--- a/Soutenance_Groupe3.pptx
+++ b/Soutenance_Groupe3.pptx
@@ -4,6 +4,9 @@
   <p:sldMasterIdLst>
     <p:sldMasterId id="2147483648" r:id="rId1"/>
   </p:sldMasterIdLst>
+  <p:notesMasterIdLst>
+    <p:notesMasterId r:id="rId15"/>
+  </p:notesMasterIdLst>
   <p:sldIdLst>
     <p:sldId id="256" r:id="rId2"/>
     <p:sldId id="257" r:id="rId3"/>
@@ -19,9 +22,6 @@
     <p:sldId id="267" r:id="rId13"/>
     <p:sldId id="268" r:id="rId14"/>
   </p:sldIdLst>
-  <p:notesMasterIdLst>
-    <p:notesMasterId r:id="rId15"/>
-  </p:notesMasterIdLst>
   <p:sldSz cx="12192000" cy="6858000"/>
   <p:notesSz cx="6858000" cy="12192000"/>
   <p:defaultTextStyle>
@@ -116,6 +116,11 @@
       </a:defRPr>
     </a:lvl9pPr>
   </p:defaultTextStyle>
+  <p:extLst>
+    <p:ext uri="{EFAFB233-063F-42B5-8137-9DF3F51BA10A}">
+      <p15:sldGuideLst xmlns:p15="http://schemas.microsoft.com/office/powerpoint/2012/main"/>
+    </p:ext>
+  </p:extLst>
 </p:presentation>
 </file>
 
@@ -141,234 +146,10 @@
           <a:chExt cx="0" cy="0"/>
         </a:xfrm>
       </p:grpSpPr>
-      <p:sp>
-        <p:nvSpPr>
-          <p:cNvPr id="2" name="Header Placeholder 1"/>
-          <p:cNvSpPr>
-            <a:spLocks noGrp="1"/>
-          </p:cNvSpPr>
-          <p:nvPr>
-            <p:ph type="hdr" sz="quarter"/>
-          </p:nvPr>
-        </p:nvSpPr>
-        <p:spPr>
-          <a:xfrm>
-            <a:off x="0" y="0"/>
-            <a:ext cx="2971800" cy="458788"/>
-          </a:xfrm>
-          <a:prstGeom prst="rect">
-            <a:avLst/>
-          </a:prstGeom>
-        </p:spPr>
-        <p:txBody>
-          <a:bodyPr vert="horz" lIns="91440" tIns="45720" rIns="91440" bIns="45720" rtlCol="0"/>
-          <a:lstStyle>
-            <a:lvl1pPr algn="l">
-              <a:defRPr sz="1200"/>
-            </a:lvl1pPr>
-          </a:lstStyle>
-          <a:p>
-            <a:endParaRPr lang="en-US"/>
-          </a:p>
-        </p:txBody>
-      </p:sp>
-      <p:sp>
-        <p:nvSpPr>
-          <p:cNvPr id="3" name="Date Placeholder 2"/>
-          <p:cNvSpPr>
-            <a:spLocks noGrp="1"/>
-          </p:cNvSpPr>
-          <p:nvPr>
-            <p:ph type="dt" idx="1"/>
-          </p:nvPr>
-        </p:nvSpPr>
-        <p:spPr>
-          <a:xfrm>
-            <a:off x="3884613" y="0"/>
-            <a:ext cx="2971800" cy="458788"/>
-          </a:xfrm>
-          <a:prstGeom prst="rect">
-            <a:avLst/>
-          </a:prstGeom>
-        </p:spPr>
-        <p:txBody>
-          <a:bodyPr vert="horz" lIns="91440" tIns="45720" rIns="91440" bIns="45720" rtlCol="0"/>
-          <a:lstStyle>
-            <a:lvl1pPr algn="r">
-              <a:defRPr sz="1200"/>
-            </a:lvl1pPr>
-          </a:lstStyle>
-          <a:p>
-            <a:fld id="{5282F153-3F37-0F45-9E97-73ACFA13230C}" type="datetimeFigureOut">
-              <a:rPr lang="en-US"/>
-              <a:t>7/23/19</a:t>
-            </a:fld>
-            <a:endParaRPr lang="en-US"/>
-          </a:p>
-        </p:txBody>
-      </p:sp>
-      <p:sp>
-        <p:nvSpPr>
-          <p:cNvPr id="4" name="Slide Image Placeholder 3"/>
-          <p:cNvSpPr>
-            <a:spLocks noGrp="1" noRot="1" noChangeAspect="1"/>
-          </p:cNvSpPr>
-          <p:nvPr>
-            <p:ph type="sldImg" idx="2"/>
-          </p:nvPr>
-        </p:nvSpPr>
-        <p:spPr>
-          <a:xfrm>
-            <a:off x="685800" y="1143000"/>
-            <a:ext cx="5486400" cy="3086100"/>
-          </a:xfrm>
-          <a:prstGeom prst="rect">
-            <a:avLst/>
-          </a:prstGeom>
-          <a:noFill/>
-          <a:ln w="12700">
-            <a:solidFill>
-              <a:prstClr val="black"/>
-            </a:solidFill>
-          </a:ln>
-        </p:spPr>
-        <p:txBody>
-          <a:bodyPr vert="horz" lIns="91440" tIns="45720" rIns="91440" bIns="45720" rtlCol="0" anchor="ctr"/>
-          <a:lstStyle/>
-          <a:p>
-            <a:endParaRPr lang="en-US"/>
-          </a:p>
-        </p:txBody>
-      </p:sp>
-      <p:sp>
-        <p:nvSpPr>
-          <p:cNvPr id="5" name="Notes Placeholder 4"/>
-          <p:cNvSpPr>
-            <a:spLocks noGrp="1"/>
-          </p:cNvSpPr>
-          <p:nvPr>
-            <p:ph type="body" sz="quarter" idx="3"/>
-          </p:nvPr>
-        </p:nvSpPr>
-        <p:spPr>
-          <a:xfrm>
-            <a:off x="685800" y="4400550"/>
-            <a:ext cx="5486400" cy="3600450"/>
-          </a:xfrm>
-          <a:prstGeom prst="rect">
-            <a:avLst/>
-          </a:prstGeom>
-        </p:spPr>
-        <p:txBody>
-          <a:bodyPr vert="horz" lIns="91440" tIns="45720" rIns="91440" bIns="45720" rtlCol="0"/>
-          <a:lstStyle/>
-          <a:p>
-            <a:pPr lvl="0"/>
-            <a:r>
-              <a:rPr lang="en-US"/>
-              <a:t>Click to edit Master text styles</a:t>
-            </a:r>
-          </a:p>
-          <a:p>
-            <a:pPr lvl="1"/>
-            <a:r>
-              <a:rPr lang="en-US"/>
-              <a:t>Second level</a:t>
-            </a:r>
-          </a:p>
-          <a:p>
-            <a:pPr lvl="2"/>
-            <a:r>
-              <a:rPr lang="en-US"/>
-              <a:t>Third level</a:t>
-            </a:r>
-          </a:p>
-          <a:p>
-            <a:pPr lvl="3"/>
-            <a:r>
-              <a:rPr lang="en-US"/>
-              <a:t>Fourth level</a:t>
-            </a:r>
-          </a:p>
-          <a:p>
-            <a:pPr lvl="4"/>
-            <a:r>
-              <a:rPr lang="en-US"/>
-              <a:t>Fifth level</a:t>
-            </a:r>
-          </a:p>
-        </p:txBody>
-      </p:sp>
-      <p:sp>
-        <p:nvSpPr>
-          <p:cNvPr id="6" name="Footer Placeholder 5"/>
-          <p:cNvSpPr>
-            <a:spLocks noGrp="1"/>
-          </p:cNvSpPr>
-          <p:nvPr>
-            <p:ph type="ftr" sz="quarter" idx="4"/>
-          </p:nvPr>
-        </p:nvSpPr>
-        <p:spPr>
-          <a:xfrm>
-            <a:off x="0" y="8685213"/>
-            <a:ext cx="2971800" cy="458787"/>
-          </a:xfrm>
-          <a:prstGeom prst="rect">
-            <a:avLst/>
-          </a:prstGeom>
-        </p:spPr>
-        <p:txBody>
-          <a:bodyPr vert="horz" lIns="91440" tIns="45720" rIns="91440" bIns="45720" rtlCol="0" anchor="b"/>
-          <a:lstStyle>
-            <a:lvl1pPr algn="l">
-              <a:defRPr sz="1200"/>
-            </a:lvl1pPr>
-          </a:lstStyle>
-          <a:p>
-            <a:endParaRPr lang="en-US"/>
-          </a:p>
-        </p:txBody>
-      </p:sp>
-      <p:sp>
-        <p:nvSpPr>
-          <p:cNvPr id="7" name="Slide Number Placeholder 6"/>
-          <p:cNvSpPr>
-            <a:spLocks noGrp="1"/>
-          </p:cNvSpPr>
-          <p:nvPr>
-            <p:ph type="sldNum" sz="quarter" idx="5"/>
-          </p:nvPr>
-        </p:nvSpPr>
-        <p:spPr>
-          <a:xfrm>
-            <a:off x="3884613" y="8685213"/>
-            <a:ext cx="2971800" cy="458787"/>
-          </a:xfrm>
-          <a:prstGeom prst="rect">
-            <a:avLst/>
-          </a:prstGeom>
-        </p:spPr>
-        <p:txBody>
-          <a:bodyPr vert="horz" lIns="91440" tIns="45720" rIns="91440" bIns="45720" rtlCol="0" anchor="b"/>
-          <a:lstStyle>
-            <a:lvl1pPr algn="r">
-              <a:defRPr sz="1200"/>
-            </a:lvl1pPr>
-          </a:lstStyle>
-          <a:p>
-            <a:fld id="{CE5E9CC1-C706-0F49-92D6-E571CC5EEA8F}" type="slidenum">
-              <a:rPr lang="en-US"/>
-              <a:t>‹#›</a:t>
-            </a:fld>
-            <a:endParaRPr lang="en-US"/>
-          </a:p>
-        </p:txBody>
-      </p:sp>
     </p:spTree>
     <p:extLst>
       <p:ext uri="{BB962C8B-B14F-4D97-AF65-F5344CB8AC3E}">
-        <p14:creationId xmlns:p14="http://schemas.microsoft.com/office/powerpoint/2010/main" val="1024086991"/>
+        <p14:creationId xmlns:p14="http://schemas.microsoft.com/office/powerpoint/2010/main" val="2747443595"/>
       </p:ext>
     </p:extLst>
   </p:cSld>
@@ -512,10 +293,6 @@
           <a:bodyPr/>
           <a:lstStyle/>
           <a:p>
-            <a:r>
-              <a:rPr lang="en-US" dirty="0"/>
-              <a:t/>
-            </a:r>
             <a:endParaRPr lang="en-US" dirty="0"/>
           </a:p>
         </p:txBody>
@@ -600,10 +377,6 @@
           <a:bodyPr/>
           <a:lstStyle/>
           <a:p>
-            <a:r>
-              <a:rPr lang="en-US" dirty="0"/>
-              <a:t/>
-            </a:r>
             <a:endParaRPr lang="en-US" dirty="0"/>
           </a:p>
         </p:txBody>
@@ -688,10 +461,6 @@
           <a:bodyPr/>
           <a:lstStyle/>
           <a:p>
-            <a:r>
-              <a:rPr lang="en-US" dirty="0"/>
-              <a:t/>
-            </a:r>
             <a:endParaRPr lang="en-US" dirty="0"/>
           </a:p>
         </p:txBody>
@@ -776,10 +545,6 @@
           <a:bodyPr/>
           <a:lstStyle/>
           <a:p>
-            <a:r>
-              <a:rPr lang="en-US" dirty="0"/>
-              <a:t/>
-            </a:r>
             <a:endParaRPr lang="en-US" dirty="0"/>
           </a:p>
         </p:txBody>
@@ -864,10 +629,6 @@
           <a:bodyPr/>
           <a:lstStyle/>
           <a:p>
-            <a:r>
-              <a:rPr lang="en-US" dirty="0"/>
-              <a:t/>
-            </a:r>
             <a:endParaRPr lang="en-US" dirty="0"/>
           </a:p>
         </p:txBody>
@@ -952,10 +713,6 @@
           <a:bodyPr/>
           <a:lstStyle/>
           <a:p>
-            <a:r>
-              <a:rPr lang="en-US" dirty="0"/>
-              <a:t/>
-            </a:r>
             <a:endParaRPr lang="en-US" dirty="0"/>
           </a:p>
         </p:txBody>
@@ -1040,10 +797,6 @@
           <a:bodyPr/>
           <a:lstStyle/>
           <a:p>
-            <a:r>
-              <a:rPr lang="en-US" dirty="0"/>
-              <a:t/>
-            </a:r>
             <a:endParaRPr lang="en-US" dirty="0"/>
           </a:p>
         </p:txBody>
@@ -1128,10 +881,6 @@
           <a:bodyPr/>
           <a:lstStyle/>
           <a:p>
-            <a:r>
-              <a:rPr lang="en-US" dirty="0"/>
-              <a:t/>
-            </a:r>
             <a:endParaRPr lang="en-US" dirty="0"/>
           </a:p>
         </p:txBody>
@@ -1216,10 +965,6 @@
           <a:bodyPr/>
           <a:lstStyle/>
           <a:p>
-            <a:r>
-              <a:rPr lang="en-US" dirty="0"/>
-              <a:t/>
-            </a:r>
             <a:endParaRPr lang="en-US" dirty="0"/>
           </a:p>
         </p:txBody>
@@ -1304,10 +1049,6 @@
           <a:bodyPr/>
           <a:lstStyle/>
           <a:p>
-            <a:r>
-              <a:rPr lang="en-US" dirty="0"/>
-              <a:t/>
-            </a:r>
             <a:endParaRPr lang="en-US" dirty="0"/>
           </a:p>
         </p:txBody>
@@ -1392,10 +1133,6 @@
           <a:bodyPr/>
           <a:lstStyle/>
           <a:p>
-            <a:r>
-              <a:rPr lang="en-US" dirty="0"/>
-              <a:t/>
-            </a:r>
             <a:endParaRPr lang="en-US" dirty="0"/>
           </a:p>
         </p:txBody>
@@ -1480,10 +1217,6 @@
           <a:bodyPr/>
           <a:lstStyle/>
           <a:p>
-            <a:r>
-              <a:rPr lang="en-US" dirty="0"/>
-              <a:t/>
-            </a:r>
             <a:endParaRPr lang="en-US" dirty="0"/>
           </a:p>
         </p:txBody>
@@ -1568,10 +1301,6 @@
           <a:bodyPr/>
           <a:lstStyle/>
           <a:p>
-            <a:r>
-              <a:rPr lang="en-US" dirty="0"/>
-              <a:t/>
-            </a:r>
             <a:endParaRPr lang="en-US" dirty="0"/>
           </a:p>
         </p:txBody>
@@ -1645,6 +1374,11 @@
 <file path=ppt/slideMasters/slideMaster1.xml><?xml version="1.0" encoding="utf-8"?>
 <p:sldMaster xmlns:a="http://schemas.openxmlformats.org/drawingml/2006/main" xmlns:r="http://schemas.openxmlformats.org/officeDocument/2006/relationships" xmlns:p="http://schemas.openxmlformats.org/presentationml/2006/main">
   <p:cSld>
+    <p:bg>
+      <p:bgRef idx="1001">
+        <a:schemeClr val="bg1"/>
+      </p:bgRef>
+    </p:bg>
     <p:spTree>
       <p:nvGrpSpPr>
         <p:cNvPr id="1" name=""/>
@@ -1927,6 +1661,7 @@
         <a:solidFill>
           <a:srgbClr val="0B1220"/>
         </a:solidFill>
+        <a:effectLst/>
       </p:bgPr>
     </p:bg>
     <p:spTree>
@@ -1945,14 +1680,14 @@
       </p:grpSpPr>
       <p:pic>
         <p:nvPicPr>
-          <p:cNvPr id="2" name="Image 0" descr="logo.png">    </p:cNvPr>
+          <p:cNvPr id="2" name="Image 0" descr="logo.png"/>
           <p:cNvPicPr>
             <a:picLocks noChangeAspect="1"/>
           </p:cNvPicPr>
           <p:nvPr/>
         </p:nvPicPr>
         <p:blipFill>
-          <a:blip r:embed="rId1"/>
+          <a:blip r:embed="rId3"/>
           <a:stretch>
             <a:fillRect/>
           </a:stretch>
@@ -1988,11 +1723,11 @@
           <a:bodyPr wrap="square" lIns="0" tIns="0" rIns="0" bIns="0" rtlCol="0" anchor="t"/>
           <a:lstStyle/>
           <a:p>
-            <a:pPr indent="0" marL="0">
-              <a:buNone/>
-            </a:pPr>
-            <a:r>
-              <a:rPr lang="en-US" sz="1250" b="1" spc="250" kern="0" dirty="0">
+            <a:pPr marL="0" indent="0">
+              <a:buNone/>
+            </a:pPr>
+            <a:r>
+              <a:rPr lang="en-US" sz="1250" b="1" kern="0" spc="250" dirty="0">
                 <a:solidFill>
                   <a:srgbClr val="38BDF8"/>
                 </a:solidFill>
@@ -2027,7 +1762,7 @@
           <a:bodyPr wrap="square" lIns="0" tIns="0" rIns="0" bIns="0" rtlCol="0" anchor="t"/>
           <a:lstStyle/>
           <a:p>
-            <a:pPr indent="0" marL="0">
+            <a:pPr marL="0" indent="0">
               <a:lnSpc>
                 <a:spcPct val="105000"/>
               </a:lnSpc>
@@ -2047,7 +1782,7 @@
             <a:endParaRPr lang="en-US" sz="4400" dirty="0"/>
           </a:p>
           <a:p>
-            <a:pPr indent="0" marL="0">
+            <a:pPr marL="0" indent="0">
               <a:lnSpc>
                 <a:spcPct val="105000"/>
               </a:lnSpc>
@@ -2089,7 +1824,7 @@
           <a:bodyPr wrap="square" lIns="0" tIns="0" rIns="0" bIns="0" rtlCol="0" anchor="t"/>
           <a:lstStyle/>
           <a:p>
-            <a:pPr indent="0" marL="0">
+            <a:pPr marL="0" indent="0">
               <a:buNone/>
             </a:pPr>
             <a:r>
@@ -2131,7 +1866,10 @@
         </p:spPr>
         <p:txBody>
           <a:bodyPr anchor="t"/>
-          <a:p/>
+          <a:lstStyle/>
+          <a:p>
+            <a:endParaRPr/>
+          </a:p>
         </p:txBody>
       </p:sp>
       <p:sp>
@@ -2155,11 +1893,11 @@
           <a:bodyPr wrap="square" lIns="0" tIns="0" rIns="0" bIns="0" rtlCol="0" anchor="t"/>
           <a:lstStyle/>
           <a:p>
-            <a:pPr indent="0" marL="0">
-              <a:buNone/>
-            </a:pPr>
-            <a:r>
-              <a:rPr lang="en-US" sz="1200" b="1" spc="200" kern="0" dirty="0">
+            <a:pPr marL="0" indent="0">
+              <a:buNone/>
+            </a:pPr>
+            <a:r>
+              <a:rPr lang="en-US" sz="1200" b="1" kern="0" spc="200" dirty="0">
                 <a:solidFill>
                   <a:srgbClr val="34D399"/>
                 </a:solidFill>
@@ -2167,7 +1905,7 @@
                 <a:ea typeface="Calibri" pitchFamily="34" charset="-122"/>
                 <a:cs typeface="Calibri" pitchFamily="34" charset="-120"/>
               </a:rPr>
-              <a:t>GROUPE 3  ·  PROJET FINAL</a:t>
+              <a:t>GROUPE 12  ·  PROJET FINAL</a:t>
             </a:r>
             <a:endParaRPr lang="en-US" sz="1200" dirty="0"/>
           </a:p>
@@ -2194,7 +1932,7 @@
           <a:bodyPr wrap="square" lIns="0" tIns="0" rIns="0" bIns="0" rtlCol="0" anchor="t"/>
           <a:lstStyle/>
           <a:p>
-            <a:pPr indent="0" marL="0">
+            <a:pPr marL="0" indent="0">
               <a:lnSpc>
                 <a:spcPct val="115000"/>
               </a:lnSpc>
@@ -2214,7 +1952,7 @@
             <a:endParaRPr lang="en-US" sz="1250" dirty="0"/>
           </a:p>
           <a:p>
-            <a:pPr indent="0" marL="0">
+            <a:pPr marL="0" indent="0">
               <a:lnSpc>
                 <a:spcPct val="115000"/>
               </a:lnSpc>
@@ -2256,7 +1994,7 @@
           <a:bodyPr wrap="square" lIns="0" tIns="0" rIns="0" bIns="0" rtlCol="0" anchor="t"/>
           <a:lstStyle/>
           <a:p>
-            <a:pPr indent="0" marL="0">
+            <a:pPr marL="0" indent="0">
               <a:lnSpc>
                 <a:spcPct val="115000"/>
               </a:lnSpc>
@@ -2276,7 +2014,7 @@
             <a:endParaRPr lang="en-US" sz="1250" dirty="0"/>
           </a:p>
           <a:p>
-            <a:pPr indent="0" marL="0">
+            <a:pPr marL="0" indent="0">
               <a:lnSpc>
                 <a:spcPct val="115000"/>
               </a:lnSpc>
@@ -2318,7 +2056,7 @@
           <a:bodyPr wrap="square" lIns="0" tIns="0" rIns="0" bIns="0" rtlCol="0" anchor="t"/>
           <a:lstStyle/>
           <a:p>
-            <a:pPr algn="r" indent="0" marL="0">
+            <a:pPr marL="0" indent="0" algn="r">
               <a:buNone/>
             </a:pPr>
             <a:r>
@@ -2352,6 +2090,7 @@
         <a:solidFill>
           <a:srgbClr val="0B1220"/>
         </a:solidFill>
+        <a:effectLst/>
       </p:bgPr>
     </p:bg>
     <p:spTree>
@@ -2389,7 +2128,7 @@
           <a:bodyPr wrap="square" lIns="0" tIns="0" rIns="0" bIns="0" rtlCol="0" anchor="t"/>
           <a:lstStyle/>
           <a:p>
-            <a:pPr indent="0" marL="0">
+            <a:pPr marL="0" indent="0">
               <a:buNone/>
             </a:pPr>
             <a:r>
@@ -2409,14 +2148,14 @@
       </p:sp>
       <p:pic>
         <p:nvPicPr>
-          <p:cNvPr id="3" name="Image 0" descr="logo.png">    </p:cNvPr>
+          <p:cNvPr id="3" name="Image 0" descr="logo.png"/>
           <p:cNvPicPr>
             <a:picLocks noChangeAspect="1"/>
           </p:cNvPicPr>
           <p:nvPr/>
         </p:nvPicPr>
         <p:blipFill>
-          <a:blip r:embed="rId1"/>
+          <a:blip r:embed="rId3"/>
           <a:stretch>
             <a:fillRect/>
           </a:stretch>
@@ -2452,7 +2191,7 @@
           <a:bodyPr wrap="square" lIns="0" tIns="0" rIns="0" bIns="0" rtlCol="0" anchor="t"/>
           <a:lstStyle/>
           <a:p>
-            <a:pPr indent="0" marL="0">
+            <a:pPr marL="0" indent="0">
               <a:buNone/>
             </a:pPr>
             <a:r>
@@ -2498,7 +2237,10 @@
         </p:spPr>
         <p:txBody>
           <a:bodyPr anchor="t"/>
-          <a:p/>
+          <a:lstStyle/>
+          <a:p>
+            <a:endParaRPr/>
+          </a:p>
         </p:txBody>
       </p:sp>
       <p:sp>
@@ -2527,7 +2269,10 @@
         </p:spPr>
         <p:txBody>
           <a:bodyPr anchor="t"/>
-          <a:p/>
+          <a:lstStyle/>
+          <a:p>
+            <a:endParaRPr/>
+          </a:p>
         </p:txBody>
       </p:sp>
       <p:sp>
@@ -2551,7 +2296,7 @@
           <a:bodyPr wrap="square" lIns="0" tIns="0" rIns="0" bIns="0" rtlCol="0" anchor="t"/>
           <a:lstStyle/>
           <a:p>
-            <a:pPr algn="ctr" indent="0" marL="0">
+            <a:pPr marL="0" indent="0" algn="ctr">
               <a:buNone/>
             </a:pPr>
             <a:r>
@@ -2590,7 +2335,7 @@
           <a:bodyPr wrap="square" lIns="0" tIns="0" rIns="0" bIns="0" rtlCol="0" anchor="t"/>
           <a:lstStyle/>
           <a:p>
-            <a:pPr indent="0" marL="0">
+            <a:pPr marL="0" indent="0">
               <a:buNone/>
             </a:pPr>
             <a:r>
@@ -2629,7 +2374,7 @@
           <a:bodyPr wrap="square" lIns="0" tIns="0" rIns="0" bIns="0" rtlCol="0" anchor="t"/>
           <a:lstStyle/>
           <a:p>
-            <a:pPr indent="0" marL="0">
+            <a:pPr marL="0" indent="0">
               <a:buNone/>
             </a:pPr>
             <a:r>
@@ -2668,7 +2413,7 @@
           <a:bodyPr wrap="square" lIns="0" tIns="0" rIns="0" bIns="0" rtlCol="0" anchor="t"/>
           <a:lstStyle/>
           <a:p>
-            <a:pPr indent="0" marL="0">
+            <a:pPr marL="0" indent="0">
               <a:buNone/>
             </a:pPr>
             <a:r>
@@ -2714,7 +2459,10 @@
         </p:spPr>
         <p:txBody>
           <a:bodyPr anchor="t"/>
-          <a:p/>
+          <a:lstStyle/>
+          <a:p>
+            <a:endParaRPr/>
+          </a:p>
         </p:txBody>
       </p:sp>
       <p:sp>
@@ -2743,7 +2491,10 @@
         </p:spPr>
         <p:txBody>
           <a:bodyPr anchor="t"/>
-          <a:p/>
+          <a:lstStyle/>
+          <a:p>
+            <a:endParaRPr/>
+          </a:p>
         </p:txBody>
       </p:sp>
       <p:sp>
@@ -2767,7 +2518,7 @@
           <a:bodyPr wrap="square" lIns="0" tIns="0" rIns="0" bIns="0" rtlCol="0" anchor="t"/>
           <a:lstStyle/>
           <a:p>
-            <a:pPr algn="ctr" indent="0" marL="0">
+            <a:pPr marL="0" indent="0" algn="ctr">
               <a:buNone/>
             </a:pPr>
             <a:r>
@@ -2806,7 +2557,7 @@
           <a:bodyPr wrap="square" lIns="0" tIns="0" rIns="0" bIns="0" rtlCol="0" anchor="t"/>
           <a:lstStyle/>
           <a:p>
-            <a:pPr indent="0" marL="0">
+            <a:pPr marL="0" indent="0">
               <a:buNone/>
             </a:pPr>
             <a:r>
@@ -2845,7 +2596,7 @@
           <a:bodyPr wrap="square" lIns="0" tIns="0" rIns="0" bIns="0" rtlCol="0" anchor="t"/>
           <a:lstStyle/>
           <a:p>
-            <a:pPr indent="0" marL="0">
+            <a:pPr marL="0" indent="0">
               <a:buNone/>
             </a:pPr>
             <a:r>
@@ -2884,7 +2635,7 @@
           <a:bodyPr wrap="square" lIns="0" tIns="0" rIns="0" bIns="0" rtlCol="0" anchor="t"/>
           <a:lstStyle/>
           <a:p>
-            <a:pPr indent="0" marL="0">
+            <a:pPr marL="0" indent="0">
               <a:buNone/>
             </a:pPr>
             <a:r>
@@ -2930,7 +2681,10 @@
         </p:spPr>
         <p:txBody>
           <a:bodyPr anchor="t"/>
-          <a:p/>
+          <a:lstStyle/>
+          <a:p>
+            <a:endParaRPr/>
+          </a:p>
         </p:txBody>
       </p:sp>
       <p:sp>
@@ -2959,7 +2713,10 @@
         </p:spPr>
         <p:txBody>
           <a:bodyPr anchor="t"/>
-          <a:p/>
+          <a:lstStyle/>
+          <a:p>
+            <a:endParaRPr/>
+          </a:p>
         </p:txBody>
       </p:sp>
       <p:sp>
@@ -2983,7 +2740,7 @@
           <a:bodyPr wrap="square" lIns="0" tIns="0" rIns="0" bIns="0" rtlCol="0" anchor="t"/>
           <a:lstStyle/>
           <a:p>
-            <a:pPr algn="ctr" indent="0" marL="0">
+            <a:pPr marL="0" indent="0" algn="ctr">
               <a:buNone/>
             </a:pPr>
             <a:r>
@@ -3022,7 +2779,7 @@
           <a:bodyPr wrap="square" lIns="0" tIns="0" rIns="0" bIns="0" rtlCol="0" anchor="t"/>
           <a:lstStyle/>
           <a:p>
-            <a:pPr indent="0" marL="0">
+            <a:pPr marL="0" indent="0">
               <a:buNone/>
             </a:pPr>
             <a:r>
@@ -3061,7 +2818,7 @@
           <a:bodyPr wrap="square" lIns="0" tIns="0" rIns="0" bIns="0" rtlCol="0" anchor="t"/>
           <a:lstStyle/>
           <a:p>
-            <a:pPr indent="0" marL="0">
+            <a:pPr marL="0" indent="0">
               <a:buNone/>
             </a:pPr>
             <a:r>
@@ -3100,7 +2857,7 @@
           <a:bodyPr wrap="square" lIns="0" tIns="0" rIns="0" bIns="0" rtlCol="0" anchor="t"/>
           <a:lstStyle/>
           <a:p>
-            <a:pPr indent="0" marL="0">
+            <a:pPr marL="0" indent="0">
               <a:buNone/>
             </a:pPr>
             <a:r>
@@ -3146,7 +2903,10 @@
         </p:spPr>
         <p:txBody>
           <a:bodyPr anchor="t"/>
-          <a:p/>
+          <a:lstStyle/>
+          <a:p>
+            <a:endParaRPr/>
+          </a:p>
         </p:txBody>
       </p:sp>
       <p:sp>
@@ -3175,7 +2935,10 @@
         </p:spPr>
         <p:txBody>
           <a:bodyPr anchor="t"/>
-          <a:p/>
+          <a:lstStyle/>
+          <a:p>
+            <a:endParaRPr/>
+          </a:p>
         </p:txBody>
       </p:sp>
       <p:sp>
@@ -3199,7 +2962,7 @@
           <a:bodyPr wrap="square" lIns="0" tIns="0" rIns="0" bIns="0" rtlCol="0" anchor="t"/>
           <a:lstStyle/>
           <a:p>
-            <a:pPr algn="ctr" indent="0" marL="0">
+            <a:pPr marL="0" indent="0" algn="ctr">
               <a:buNone/>
             </a:pPr>
             <a:r>
@@ -3238,7 +3001,7 @@
           <a:bodyPr wrap="square" lIns="0" tIns="0" rIns="0" bIns="0" rtlCol="0" anchor="t"/>
           <a:lstStyle/>
           <a:p>
-            <a:pPr indent="0" marL="0">
+            <a:pPr marL="0" indent="0">
               <a:buNone/>
             </a:pPr>
             <a:r>
@@ -3277,7 +3040,7 @@
           <a:bodyPr wrap="square" lIns="0" tIns="0" rIns="0" bIns="0" rtlCol="0" anchor="t"/>
           <a:lstStyle/>
           <a:p>
-            <a:pPr indent="0" marL="0">
+            <a:pPr marL="0" indent="0">
               <a:buNone/>
             </a:pPr>
             <a:r>
@@ -3316,7 +3079,7 @@
           <a:bodyPr wrap="square" lIns="0" tIns="0" rIns="0" bIns="0" rtlCol="0" anchor="t"/>
           <a:lstStyle/>
           <a:p>
-            <a:pPr indent="0" marL="0">
+            <a:pPr marL="0" indent="0">
               <a:buNone/>
             </a:pPr>
             <a:r>
@@ -3362,7 +3125,10 @@
         </p:spPr>
         <p:txBody>
           <a:bodyPr anchor="t"/>
-          <a:p/>
+          <a:lstStyle/>
+          <a:p>
+            <a:endParaRPr/>
+          </a:p>
         </p:txBody>
       </p:sp>
       <p:sp>
@@ -3386,7 +3152,7 @@
           <a:bodyPr wrap="square" lIns="0" tIns="0" rIns="0" bIns="0" rtlCol="0" anchor="t"/>
           <a:lstStyle/>
           <a:p>
-            <a:pPr indent="0" marL="0">
+            <a:pPr marL="0" indent="0">
               <a:buNone/>
             </a:pPr>
             <a:r>
@@ -3425,7 +3191,7 @@
           <a:bodyPr wrap="square" lIns="0" tIns="0" rIns="0" bIns="0" rtlCol="0" anchor="t"/>
           <a:lstStyle/>
           <a:p>
-            <a:pPr indent="0" marL="0">
+            <a:pPr marL="0" indent="0">
               <a:buNone/>
             </a:pPr>
             <a:r>
@@ -3464,7 +3230,7 @@
           <a:bodyPr wrap="square" lIns="0" tIns="0" rIns="0" bIns="0" rtlCol="0" anchor="t"/>
           <a:lstStyle/>
           <a:p>
-            <a:pPr algn="r" indent="0" marL="0">
+            <a:pPr marL="0" indent="0" algn="r">
               <a:buNone/>
             </a:pPr>
             <a:r>
@@ -3498,6 +3264,7 @@
         <a:solidFill>
           <a:srgbClr val="0B1220"/>
         </a:solidFill>
+        <a:effectLst/>
       </p:bgPr>
     </p:bg>
     <p:spTree>
@@ -3535,7 +3302,7 @@
           <a:bodyPr wrap="square" lIns="0" tIns="0" rIns="0" bIns="0" rtlCol="0" anchor="t"/>
           <a:lstStyle/>
           <a:p>
-            <a:pPr indent="0" marL="0">
+            <a:pPr marL="0" indent="0">
               <a:buNone/>
             </a:pPr>
             <a:r>
@@ -3555,14 +3322,14 @@
       </p:sp>
       <p:pic>
         <p:nvPicPr>
-          <p:cNvPr id="3" name="Image 0" descr="logo.png">    </p:cNvPr>
+          <p:cNvPr id="3" name="Image 0" descr="logo.png"/>
           <p:cNvPicPr>
             <a:picLocks noChangeAspect="1"/>
           </p:cNvPicPr>
           <p:nvPr/>
         </p:nvPicPr>
         <p:blipFill>
-          <a:blip r:embed="rId1"/>
+          <a:blip r:embed="rId3"/>
           <a:stretch>
             <a:fillRect/>
           </a:stretch>
@@ -3598,7 +3365,7 @@
           <a:bodyPr wrap="square" lIns="0" tIns="0" rIns="0" bIns="0" rtlCol="0" anchor="t"/>
           <a:lstStyle/>
           <a:p>
-            <a:pPr indent="0" marL="0">
+            <a:pPr marL="0" indent="0">
               <a:buNone/>
             </a:pPr>
             <a:r>
@@ -3637,7 +3404,7 @@
           <a:bodyPr wrap="square" lIns="0" tIns="0" rIns="0" bIns="0" rtlCol="0" anchor="t"/>
           <a:lstStyle/>
           <a:p>
-            <a:pPr indent="0" marL="0">
+            <a:pPr marL="0" indent="0">
               <a:buNone/>
             </a:pPr>
             <a:r>
@@ -3676,7 +3443,7 @@
           <a:bodyPr wrap="square" lIns="0" tIns="0" rIns="0" bIns="0" rtlCol="0" anchor="t"/>
           <a:lstStyle/>
           <a:p>
-            <a:pPr indent="0" marL="0">
+            <a:pPr marL="0" indent="0">
               <a:buNone/>
             </a:pPr>
             <a:r>
@@ -3715,7 +3482,7 @@
           <a:bodyPr wrap="square" lIns="0" tIns="0" rIns="0" bIns="0" rtlCol="0" anchor="t"/>
           <a:lstStyle/>
           <a:p>
-            <a:pPr indent="0" marL="0">
+            <a:pPr marL="0" indent="0">
               <a:buNone/>
             </a:pPr>
             <a:r>
@@ -3757,7 +3524,10 @@
         </p:spPr>
         <p:txBody>
           <a:bodyPr anchor="t"/>
-          <a:p/>
+          <a:lstStyle/>
+          <a:p>
+            <a:endParaRPr/>
+          </a:p>
         </p:txBody>
       </p:sp>
       <p:sp>
@@ -3781,7 +3551,7 @@
           <a:bodyPr wrap="square" lIns="0" tIns="0" rIns="0" bIns="0" rtlCol="0" anchor="t"/>
           <a:lstStyle/>
           <a:p>
-            <a:pPr indent="0" marL="0">
+            <a:pPr marL="0" indent="0">
               <a:buNone/>
             </a:pPr>
             <a:r>
@@ -3820,7 +3590,7 @@
           <a:bodyPr wrap="square" lIns="0" tIns="0" rIns="0" bIns="0" rtlCol="0" anchor="t"/>
           <a:lstStyle/>
           <a:p>
-            <a:pPr indent="0" marL="0">
+            <a:pPr marL="0" indent="0">
               <a:buNone/>
             </a:pPr>
             <a:r>
@@ -3859,7 +3629,7 @@
           <a:bodyPr wrap="square" lIns="0" tIns="0" rIns="0" bIns="0" rtlCol="0" anchor="t"/>
           <a:lstStyle/>
           <a:p>
-            <a:pPr indent="0" marL="0">
+            <a:pPr marL="0" indent="0">
               <a:buNone/>
             </a:pPr>
             <a:r>
@@ -3901,7 +3671,10 @@
         </p:spPr>
         <p:txBody>
           <a:bodyPr anchor="t"/>
-          <a:p/>
+          <a:lstStyle/>
+          <a:p>
+            <a:endParaRPr/>
+          </a:p>
         </p:txBody>
       </p:sp>
       <p:sp>
@@ -3925,7 +3698,7 @@
           <a:bodyPr wrap="square" lIns="0" tIns="0" rIns="0" bIns="0" rtlCol="0" anchor="t"/>
           <a:lstStyle/>
           <a:p>
-            <a:pPr indent="0" marL="0">
+            <a:pPr marL="0" indent="0">
               <a:buNone/>
             </a:pPr>
             <a:r>
@@ -3964,7 +3737,7 @@
           <a:bodyPr wrap="square" lIns="0" tIns="0" rIns="0" bIns="0" rtlCol="0" anchor="t"/>
           <a:lstStyle/>
           <a:p>
-            <a:pPr indent="0" marL="0">
+            <a:pPr marL="0" indent="0">
               <a:buNone/>
             </a:pPr>
             <a:r>
@@ -4003,7 +3776,7 @@
           <a:bodyPr wrap="square" lIns="0" tIns="0" rIns="0" bIns="0" rtlCol="0" anchor="t"/>
           <a:lstStyle/>
           <a:p>
-            <a:pPr indent="0" marL="0">
+            <a:pPr marL="0" indent="0">
               <a:buNone/>
             </a:pPr>
             <a:r>
@@ -4045,7 +3818,10 @@
         </p:spPr>
         <p:txBody>
           <a:bodyPr anchor="t"/>
-          <a:p/>
+          <a:lstStyle/>
+          <a:p>
+            <a:endParaRPr/>
+          </a:p>
         </p:txBody>
       </p:sp>
       <p:sp>
@@ -4069,7 +3845,7 @@
           <a:bodyPr wrap="square" lIns="0" tIns="0" rIns="0" bIns="0" rtlCol="0" anchor="t"/>
           <a:lstStyle/>
           <a:p>
-            <a:pPr indent="0" marL="0">
+            <a:pPr marL="0" indent="0">
               <a:buNone/>
             </a:pPr>
             <a:r>
@@ -4108,7 +3884,7 @@
           <a:bodyPr wrap="square" lIns="0" tIns="0" rIns="0" bIns="0" rtlCol="0" anchor="t"/>
           <a:lstStyle/>
           <a:p>
-            <a:pPr indent="0" marL="0">
+            <a:pPr marL="0" indent="0">
               <a:buNone/>
             </a:pPr>
             <a:r>
@@ -4147,7 +3923,7 @@
           <a:bodyPr wrap="square" lIns="0" tIns="0" rIns="0" bIns="0" rtlCol="0" anchor="t"/>
           <a:lstStyle/>
           <a:p>
-            <a:pPr indent="0" marL="0">
+            <a:pPr marL="0" indent="0">
               <a:buNone/>
             </a:pPr>
             <a:r>
@@ -4189,7 +3965,10 @@
         </p:spPr>
         <p:txBody>
           <a:bodyPr anchor="t"/>
-          <a:p/>
+          <a:lstStyle/>
+          <a:p>
+            <a:endParaRPr/>
+          </a:p>
         </p:txBody>
       </p:sp>
       <p:sp>
@@ -4213,7 +3992,7 @@
           <a:bodyPr wrap="square" lIns="0" tIns="0" rIns="0" bIns="0" rtlCol="0" anchor="t"/>
           <a:lstStyle/>
           <a:p>
-            <a:pPr indent="0" marL="0">
+            <a:pPr marL="0" indent="0">
               <a:buNone/>
             </a:pPr>
             <a:r>
@@ -4252,7 +4031,7 @@
           <a:bodyPr wrap="square" lIns="0" tIns="0" rIns="0" bIns="0" rtlCol="0" anchor="t"/>
           <a:lstStyle/>
           <a:p>
-            <a:pPr indent="0" marL="0">
+            <a:pPr marL="0" indent="0">
               <a:buNone/>
             </a:pPr>
             <a:r>
@@ -4291,7 +4070,7 @@
           <a:bodyPr wrap="square" lIns="0" tIns="0" rIns="0" bIns="0" rtlCol="0" anchor="t"/>
           <a:lstStyle/>
           <a:p>
-            <a:pPr indent="0" marL="0">
+            <a:pPr marL="0" indent="0">
               <a:buNone/>
             </a:pPr>
             <a:r>
@@ -4330,7 +4109,7 @@
           <a:bodyPr wrap="square" lIns="0" tIns="0" rIns="0" bIns="0" rtlCol="0" anchor="t"/>
           <a:lstStyle/>
           <a:p>
-            <a:pPr algn="r" indent="0" marL="0">
+            <a:pPr marL="0" indent="0" algn="r">
               <a:buNone/>
             </a:pPr>
             <a:r>
@@ -4364,6 +4143,7 @@
         <a:solidFill>
           <a:srgbClr val="0B1220"/>
         </a:solidFill>
+        <a:effectLst/>
       </p:bgPr>
     </p:bg>
     <p:spTree>
@@ -4401,7 +4181,7 @@
           <a:bodyPr wrap="square" lIns="0" tIns="0" rIns="0" bIns="0" rtlCol="0" anchor="t"/>
           <a:lstStyle/>
           <a:p>
-            <a:pPr indent="0" marL="0">
+            <a:pPr marL="0" indent="0">
               <a:buNone/>
             </a:pPr>
             <a:r>
@@ -4421,14 +4201,14 @@
       </p:sp>
       <p:pic>
         <p:nvPicPr>
-          <p:cNvPr id="3" name="Image 0" descr="logo.png">    </p:cNvPr>
+          <p:cNvPr id="3" name="Image 0" descr="logo.png"/>
           <p:cNvPicPr>
             <a:picLocks noChangeAspect="1"/>
           </p:cNvPicPr>
           <p:nvPr/>
         </p:nvPicPr>
         <p:blipFill>
-          <a:blip r:embed="rId1"/>
+          <a:blip r:embed="rId3"/>
           <a:stretch>
             <a:fillRect/>
           </a:stretch>
@@ -4464,7 +4244,7 @@
           <a:bodyPr wrap="square" lIns="0" tIns="0" rIns="0" bIns="0" rtlCol="0" anchor="t"/>
           <a:lstStyle/>
           <a:p>
-            <a:pPr indent="0" marL="0">
+            <a:pPr marL="0" indent="0">
               <a:buNone/>
             </a:pPr>
             <a:r>
@@ -4510,7 +4290,10 @@
         </p:spPr>
         <p:txBody>
           <a:bodyPr anchor="t"/>
-          <a:p/>
+          <a:lstStyle/>
+          <a:p>
+            <a:endParaRPr/>
+          </a:p>
         </p:txBody>
       </p:sp>
       <p:sp>
@@ -4534,7 +4317,7 @@
           <a:bodyPr wrap="square" lIns="0" tIns="0" rIns="0" bIns="0" rtlCol="0" anchor="t"/>
           <a:lstStyle/>
           <a:p>
-            <a:pPr indent="0" marL="0">
+            <a:pPr marL="0" indent="0">
               <a:buNone/>
             </a:pPr>
             <a:r>
@@ -4686,7 +4469,10 @@
         </p:spPr>
         <p:txBody>
           <a:bodyPr anchor="t"/>
-          <a:p/>
+          <a:lstStyle/>
+          <a:p>
+            <a:endParaRPr/>
+          </a:p>
         </p:txBody>
       </p:sp>
       <p:sp>
@@ -4710,7 +4496,7 @@
           <a:bodyPr wrap="square" lIns="0" tIns="0" rIns="0" bIns="0" rtlCol="0" anchor="t"/>
           <a:lstStyle/>
           <a:p>
-            <a:pPr indent="0" marL="0">
+            <a:pPr marL="0" indent="0">
               <a:buNone/>
             </a:pPr>
             <a:r>
@@ -4855,7 +4641,7 @@
           <a:bodyPr wrap="square" lIns="0" tIns="0" rIns="0" bIns="0" rtlCol="0" anchor="t"/>
           <a:lstStyle/>
           <a:p>
-            <a:pPr algn="r" indent="0" marL="0">
+            <a:pPr marL="0" indent="0" algn="r">
               <a:buNone/>
             </a:pPr>
             <a:r>
@@ -4889,6 +4675,7 @@
         <a:solidFill>
           <a:srgbClr val="0B1220"/>
         </a:solidFill>
+        <a:effectLst/>
       </p:bgPr>
     </p:bg>
     <p:spTree>
@@ -4926,11 +4713,11 @@
           <a:bodyPr wrap="square" lIns="0" tIns="0" rIns="0" bIns="0" rtlCol="0" anchor="t"/>
           <a:lstStyle/>
           <a:p>
-            <a:pPr indent="0" marL="0">
-              <a:buNone/>
-            </a:pPr>
-            <a:r>
-              <a:rPr lang="en-US" sz="1300" b="1" spc="300" kern="0" dirty="0">
+            <a:pPr marL="0" indent="0">
+              <a:buNone/>
+            </a:pPr>
+            <a:r>
+              <a:rPr lang="en-US" sz="1300" b="1" kern="0" spc="300" dirty="0">
                 <a:solidFill>
                   <a:srgbClr val="38BDF8"/>
                 </a:solidFill>
@@ -4965,7 +4752,7 @@
           <a:bodyPr wrap="square" lIns="0" tIns="0" rIns="0" bIns="0" rtlCol="0" anchor="t"/>
           <a:lstStyle/>
           <a:p>
-            <a:pPr indent="0" marL="0">
+            <a:pPr marL="0" indent="0">
               <a:buNone/>
             </a:pPr>
             <a:r>
@@ -5004,7 +4791,7 @@
           <a:bodyPr wrap="square" lIns="0" tIns="0" rIns="0" bIns="0" rtlCol="0" anchor="t"/>
           <a:lstStyle/>
           <a:p>
-            <a:pPr indent="0" marL="0">
+            <a:pPr marL="0" indent="0">
               <a:buNone/>
             </a:pPr>
             <a:r>
@@ -5024,14 +4811,14 @@
       </p:sp>
       <p:pic>
         <p:nvPicPr>
-          <p:cNvPr id="5" name="Image 0" descr="logo.png">    </p:cNvPr>
+          <p:cNvPr id="5" name="Image 0" descr="logo.png"/>
           <p:cNvPicPr>
             <a:picLocks noChangeAspect="1"/>
           </p:cNvPicPr>
           <p:nvPr/>
         </p:nvPicPr>
         <p:blipFill>
-          <a:blip r:embed="rId1"/>
+          <a:blip r:embed="rId3"/>
           <a:stretch>
             <a:fillRect/>
           </a:stretch>
@@ -5067,7 +4854,7 @@
           <a:bodyPr wrap="square" lIns="0" tIns="0" rIns="0" bIns="0" rtlCol="0" anchor="t"/>
           <a:lstStyle/>
           <a:p>
-            <a:pPr algn="r" indent="0" marL="0">
+            <a:pPr marL="0" indent="0" algn="r">
               <a:buNone/>
             </a:pPr>
             <a:r>
@@ -5101,6 +4888,7 @@
         <a:solidFill>
           <a:srgbClr val="0B1220"/>
         </a:solidFill>
+        <a:effectLst/>
       </p:bgPr>
     </p:bg>
     <p:spTree>
@@ -5138,7 +4926,7 @@
           <a:bodyPr wrap="square" lIns="0" tIns="0" rIns="0" bIns="0" rtlCol="0" anchor="t"/>
           <a:lstStyle/>
           <a:p>
-            <a:pPr indent="0" marL="0">
+            <a:pPr marL="0" indent="0">
               <a:buNone/>
             </a:pPr>
             <a:r>
@@ -5158,14 +4946,14 @@
       </p:sp>
       <p:pic>
         <p:nvPicPr>
-          <p:cNvPr id="3" name="Image 0" descr="logo.png">    </p:cNvPr>
+          <p:cNvPr id="3" name="Image 0" descr="logo.png"/>
           <p:cNvPicPr>
             <a:picLocks noChangeAspect="1"/>
           </p:cNvPicPr>
           <p:nvPr/>
         </p:nvPicPr>
         <p:blipFill>
-          <a:blip r:embed="rId1"/>
+          <a:blip r:embed="rId3"/>
           <a:stretch>
             <a:fillRect/>
           </a:stretch>
@@ -5201,7 +4989,7 @@
           <a:bodyPr wrap="square" lIns="0" tIns="0" rIns="0" bIns="0" rtlCol="0" anchor="t"/>
           <a:lstStyle/>
           <a:p>
-            <a:pPr indent="0" marL="0">
+            <a:pPr marL="0" indent="0">
               <a:buNone/>
             </a:pPr>
             <a:r>
@@ -5247,7 +5035,10 @@
         </p:spPr>
         <p:txBody>
           <a:bodyPr anchor="t"/>
-          <a:p/>
+          <a:lstStyle/>
+          <a:p>
+            <a:endParaRPr/>
+          </a:p>
         </p:txBody>
       </p:sp>
       <p:sp>
@@ -5271,7 +5062,7 @@
           <a:bodyPr wrap="square" lIns="0" tIns="0" rIns="0" bIns="0" rtlCol="0" anchor="t"/>
           <a:lstStyle/>
           <a:p>
-            <a:pPr indent="0" marL="0">
+            <a:pPr marL="0" indent="0">
               <a:buNone/>
             </a:pPr>
             <a:r>
@@ -5310,7 +5101,7 @@
           <a:bodyPr wrap="square" lIns="0" tIns="0" rIns="0" bIns="0" rtlCol="0" anchor="t"/>
           <a:lstStyle/>
           <a:p>
-            <a:pPr indent="0" marL="0">
+            <a:pPr marL="0" indent="0">
               <a:buNone/>
             </a:pPr>
             <a:r>
@@ -5349,7 +5140,7 @@
           <a:bodyPr wrap="square" lIns="0" tIns="0" rIns="0" bIns="0" rtlCol="0" anchor="t"/>
           <a:lstStyle/>
           <a:p>
-            <a:pPr indent="0" marL="0">
+            <a:pPr marL="0" indent="0">
               <a:buNone/>
             </a:pPr>
             <a:r>
@@ -5395,7 +5186,10 @@
         </p:spPr>
         <p:txBody>
           <a:bodyPr anchor="t"/>
-          <a:p/>
+          <a:lstStyle/>
+          <a:p>
+            <a:endParaRPr/>
+          </a:p>
         </p:txBody>
       </p:sp>
       <p:sp>
@@ -5419,7 +5213,7 @@
           <a:bodyPr wrap="square" lIns="0" tIns="0" rIns="0" bIns="0" rtlCol="0" anchor="t"/>
           <a:lstStyle/>
           <a:p>
-            <a:pPr indent="0" marL="0">
+            <a:pPr marL="0" indent="0">
               <a:buNone/>
             </a:pPr>
             <a:r>
@@ -5458,7 +5252,7 @@
           <a:bodyPr wrap="square" lIns="0" tIns="0" rIns="0" bIns="0" rtlCol="0" anchor="t"/>
           <a:lstStyle/>
           <a:p>
-            <a:pPr indent="0" marL="0">
+            <a:pPr marL="0" indent="0">
               <a:buNone/>
             </a:pPr>
             <a:r>
@@ -5497,7 +5291,7 @@
           <a:bodyPr wrap="square" lIns="0" tIns="0" rIns="0" bIns="0" rtlCol="0" anchor="t"/>
           <a:lstStyle/>
           <a:p>
-            <a:pPr indent="0" marL="0">
+            <a:pPr marL="0" indent="0">
               <a:buNone/>
             </a:pPr>
             <a:r>
@@ -5543,7 +5337,10 @@
         </p:spPr>
         <p:txBody>
           <a:bodyPr anchor="t"/>
-          <a:p/>
+          <a:lstStyle/>
+          <a:p>
+            <a:endParaRPr/>
+          </a:p>
         </p:txBody>
       </p:sp>
       <p:sp>
@@ -5567,7 +5364,7 @@
           <a:bodyPr wrap="square" lIns="0" tIns="0" rIns="0" bIns="0" rtlCol="0" anchor="t"/>
           <a:lstStyle/>
           <a:p>
-            <a:pPr indent="0" marL="0">
+            <a:pPr marL="0" indent="0">
               <a:buNone/>
             </a:pPr>
             <a:r>
@@ -5606,7 +5403,7 @@
           <a:bodyPr wrap="square" lIns="0" tIns="0" rIns="0" bIns="0" rtlCol="0" anchor="t"/>
           <a:lstStyle/>
           <a:p>
-            <a:pPr indent="0" marL="0">
+            <a:pPr marL="0" indent="0">
               <a:buNone/>
             </a:pPr>
             <a:r>
@@ -5645,7 +5442,7 @@
           <a:bodyPr wrap="square" lIns="0" tIns="0" rIns="0" bIns="0" rtlCol="0" anchor="t"/>
           <a:lstStyle/>
           <a:p>
-            <a:pPr indent="0" marL="0">
+            <a:pPr marL="0" indent="0">
               <a:buNone/>
             </a:pPr>
             <a:r>
@@ -5691,7 +5488,10 @@
         </p:spPr>
         <p:txBody>
           <a:bodyPr anchor="t"/>
-          <a:p/>
+          <a:lstStyle/>
+          <a:p>
+            <a:endParaRPr/>
+          </a:p>
         </p:txBody>
       </p:sp>
       <p:sp>
@@ -5715,7 +5515,7 @@
           <a:bodyPr wrap="square" lIns="0" tIns="0" rIns="0" bIns="0" rtlCol="0" anchor="t"/>
           <a:lstStyle/>
           <a:p>
-            <a:pPr indent="0" marL="0">
+            <a:pPr marL="0" indent="0">
               <a:buNone/>
             </a:pPr>
             <a:r>
@@ -5754,7 +5554,7 @@
           <a:bodyPr wrap="square" lIns="0" tIns="0" rIns="0" bIns="0" rtlCol="0" anchor="t"/>
           <a:lstStyle/>
           <a:p>
-            <a:pPr indent="0" marL="0">
+            <a:pPr marL="0" indent="0">
               <a:buNone/>
             </a:pPr>
             <a:r>
@@ -5793,7 +5593,7 @@
           <a:bodyPr wrap="square" lIns="0" tIns="0" rIns="0" bIns="0" rtlCol="0" anchor="t"/>
           <a:lstStyle/>
           <a:p>
-            <a:pPr indent="0" marL="0">
+            <a:pPr marL="0" indent="0">
               <a:buNone/>
             </a:pPr>
             <a:r>
@@ -5839,7 +5639,10 @@
         </p:spPr>
         <p:txBody>
           <a:bodyPr anchor="t"/>
-          <a:p/>
+          <a:lstStyle/>
+          <a:p>
+            <a:endParaRPr/>
+          </a:p>
         </p:txBody>
       </p:sp>
       <p:sp>
@@ -5863,7 +5666,7 @@
           <a:bodyPr wrap="square" lIns="0" tIns="0" rIns="0" bIns="0" rtlCol="0" anchor="t"/>
           <a:lstStyle/>
           <a:p>
-            <a:pPr indent="0" marL="0">
+            <a:pPr marL="0" indent="0">
               <a:buNone/>
             </a:pPr>
             <a:r>
@@ -5907,7 +5710,10 @@
         </p:spPr>
         <p:txBody>
           <a:bodyPr anchor="t"/>
-          <a:p/>
+          <a:lstStyle/>
+          <a:p>
+            <a:endParaRPr/>
+          </a:p>
         </p:txBody>
       </p:sp>
       <p:sp>
@@ -5931,7 +5737,7 @@
           <a:bodyPr wrap="square" lIns="0" tIns="0" rIns="0" bIns="0" rtlCol="0" anchor="t"/>
           <a:lstStyle/>
           <a:p>
-            <a:pPr indent="0" marL="0">
+            <a:pPr marL="0" indent="0">
               <a:buNone/>
             </a:pPr>
             <a:r>
@@ -5970,7 +5776,7 @@
           <a:bodyPr wrap="square" lIns="0" tIns="0" rIns="0" bIns="0" rtlCol="0" anchor="t"/>
           <a:lstStyle/>
           <a:p>
-            <a:pPr indent="0" marL="0">
+            <a:pPr marL="0" indent="0">
               <a:buNone/>
             </a:pPr>
             <a:r>
@@ -6014,7 +5820,10 @@
         </p:spPr>
         <p:txBody>
           <a:bodyPr anchor="t"/>
-          <a:p/>
+          <a:lstStyle/>
+          <a:p>
+            <a:endParaRPr/>
+          </a:p>
         </p:txBody>
       </p:sp>
       <p:sp>
@@ -6038,7 +5847,7 @@
           <a:bodyPr wrap="square" lIns="0" tIns="0" rIns="0" bIns="0" rtlCol="0" anchor="t"/>
           <a:lstStyle/>
           <a:p>
-            <a:pPr indent="0" marL="0">
+            <a:pPr marL="0" indent="0">
               <a:buNone/>
             </a:pPr>
             <a:r>
@@ -6077,7 +5886,7 @@
           <a:bodyPr wrap="square" lIns="0" tIns="0" rIns="0" bIns="0" rtlCol="0" anchor="t"/>
           <a:lstStyle/>
           <a:p>
-            <a:pPr indent="0" marL="0">
+            <a:pPr marL="0" indent="0">
               <a:buNone/>
             </a:pPr>
             <a:r>
@@ -6121,7 +5930,10 @@
         </p:spPr>
         <p:txBody>
           <a:bodyPr anchor="t"/>
-          <a:p/>
+          <a:lstStyle/>
+          <a:p>
+            <a:endParaRPr/>
+          </a:p>
         </p:txBody>
       </p:sp>
       <p:sp>
@@ -6145,7 +5957,7 @@
           <a:bodyPr wrap="square" lIns="0" tIns="0" rIns="0" bIns="0" rtlCol="0" anchor="t"/>
           <a:lstStyle/>
           <a:p>
-            <a:pPr indent="0" marL="0">
+            <a:pPr marL="0" indent="0">
               <a:buNone/>
             </a:pPr>
             <a:r>
@@ -6184,7 +5996,7 @@
           <a:bodyPr wrap="square" lIns="0" tIns="0" rIns="0" bIns="0" rtlCol="0" anchor="t"/>
           <a:lstStyle/>
           <a:p>
-            <a:pPr indent="0" marL="0">
+            <a:pPr marL="0" indent="0">
               <a:buNone/>
             </a:pPr>
             <a:r>
@@ -6228,7 +6040,10 @@
         </p:spPr>
         <p:txBody>
           <a:bodyPr anchor="t"/>
-          <a:p/>
+          <a:lstStyle/>
+          <a:p>
+            <a:endParaRPr/>
+          </a:p>
         </p:txBody>
       </p:sp>
       <p:sp>
@@ -6252,7 +6067,7 @@
           <a:bodyPr wrap="square" lIns="0" tIns="0" rIns="0" bIns="0" rtlCol="0" anchor="t"/>
           <a:lstStyle/>
           <a:p>
-            <a:pPr indent="0" marL="0">
+            <a:pPr marL="0" indent="0">
               <a:buNone/>
             </a:pPr>
             <a:r>
@@ -6291,7 +6106,7 @@
           <a:bodyPr wrap="square" lIns="0" tIns="0" rIns="0" bIns="0" rtlCol="0" anchor="t"/>
           <a:lstStyle/>
           <a:p>
-            <a:pPr indent="0" marL="0">
+            <a:pPr marL="0" indent="0">
               <a:buNone/>
             </a:pPr>
             <a:r>
@@ -6330,7 +6145,7 @@
           <a:bodyPr wrap="square" lIns="0" tIns="0" rIns="0" bIns="0" rtlCol="0" anchor="t"/>
           <a:lstStyle/>
           <a:p>
-            <a:pPr algn="r" indent="0" marL="0">
+            <a:pPr marL="0" indent="0" algn="r">
               <a:buNone/>
             </a:pPr>
             <a:r>
@@ -6364,6 +6179,7 @@
         <a:solidFill>
           <a:srgbClr val="0B1220"/>
         </a:solidFill>
+        <a:effectLst/>
       </p:bgPr>
     </p:bg>
     <p:spTree>
@@ -6401,7 +6217,7 @@
           <a:bodyPr wrap="square" lIns="0" tIns="0" rIns="0" bIns="0" rtlCol="0" anchor="t"/>
           <a:lstStyle/>
           <a:p>
-            <a:pPr indent="0" marL="0">
+            <a:pPr marL="0" indent="0">
               <a:buNone/>
             </a:pPr>
             <a:r>
@@ -6421,14 +6237,14 @@
       </p:sp>
       <p:pic>
         <p:nvPicPr>
-          <p:cNvPr id="3" name="Image 0" descr="logo.png">    </p:cNvPr>
+          <p:cNvPr id="3" name="Image 0" descr="logo.png"/>
           <p:cNvPicPr>
             <a:picLocks noChangeAspect="1"/>
           </p:cNvPicPr>
           <p:nvPr/>
         </p:nvPicPr>
         <p:blipFill>
-          <a:blip r:embed="rId1"/>
+          <a:blip r:embed="rId3"/>
           <a:stretch>
             <a:fillRect/>
           </a:stretch>
@@ -6464,7 +6280,7 @@
           <a:bodyPr wrap="square" lIns="0" tIns="0" rIns="0" bIns="0" rtlCol="0" anchor="t"/>
           <a:lstStyle/>
           <a:p>
-            <a:pPr indent="0" marL="0">
+            <a:pPr marL="0" indent="0">
               <a:buNone/>
             </a:pPr>
             <a:r>
@@ -6510,7 +6326,10 @@
         </p:spPr>
         <p:txBody>
           <a:bodyPr anchor="t"/>
-          <a:p/>
+          <a:lstStyle/>
+          <a:p>
+            <a:endParaRPr/>
+          </a:p>
         </p:txBody>
       </p:sp>
       <p:sp>
@@ -6534,7 +6353,7 @@
           <a:bodyPr wrap="square" lIns="0" tIns="0" rIns="0" bIns="0" rtlCol="0" anchor="t"/>
           <a:lstStyle/>
           <a:p>
-            <a:pPr indent="0" marL="0">
+            <a:pPr marL="0" indent="0">
               <a:buNone/>
             </a:pPr>
             <a:r>
@@ -6573,7 +6392,7 @@
           <a:bodyPr wrap="square" lIns="0" tIns="0" rIns="0" bIns="0" rtlCol="0" anchor="t"/>
           <a:lstStyle/>
           <a:p>
-            <a:pPr indent="0" marL="0">
+            <a:pPr marL="0" indent="0">
               <a:buNone/>
             </a:pPr>
             <a:r>
@@ -6612,7 +6431,7 @@
           <a:bodyPr wrap="square" lIns="0" tIns="0" rIns="0" bIns="0" rtlCol="0" anchor="t"/>
           <a:lstStyle/>
           <a:p>
-            <a:pPr indent="0" marL="0">
+            <a:pPr marL="0" indent="0">
               <a:buNone/>
             </a:pPr>
             <a:r>
@@ -6651,7 +6470,7 @@
           <a:bodyPr wrap="square" lIns="0" tIns="0" rIns="0" bIns="0" rtlCol="0" anchor="t"/>
           <a:lstStyle/>
           <a:p>
-            <a:pPr indent="0" marL="0">
+            <a:pPr marL="0" indent="0">
               <a:buNone/>
             </a:pPr>
             <a:r>
@@ -6697,7 +6516,10 @@
         </p:spPr>
         <p:txBody>
           <a:bodyPr anchor="t"/>
-          <a:p/>
+          <a:lstStyle/>
+          <a:p>
+            <a:endParaRPr/>
+          </a:p>
         </p:txBody>
       </p:sp>
       <p:sp>
@@ -6721,7 +6543,7 @@
           <a:bodyPr wrap="square" lIns="0" tIns="0" rIns="0" bIns="0" rtlCol="0" anchor="t"/>
           <a:lstStyle/>
           <a:p>
-            <a:pPr indent="0" marL="0">
+            <a:pPr marL="0" indent="0">
               <a:buNone/>
             </a:pPr>
             <a:r>
@@ -6760,7 +6582,7 @@
           <a:bodyPr wrap="square" lIns="0" tIns="0" rIns="0" bIns="0" rtlCol="0" anchor="t"/>
           <a:lstStyle/>
           <a:p>
-            <a:pPr indent="0" marL="0">
+            <a:pPr marL="0" indent="0">
               <a:buNone/>
             </a:pPr>
             <a:r>
@@ -6799,7 +6621,7 @@
           <a:bodyPr wrap="square" lIns="0" tIns="0" rIns="0" bIns="0" rtlCol="0" anchor="t"/>
           <a:lstStyle/>
           <a:p>
-            <a:pPr indent="0" marL="0">
+            <a:pPr marL="0" indent="0">
               <a:buNone/>
             </a:pPr>
             <a:r>
@@ -6838,7 +6660,7 @@
           <a:bodyPr wrap="square" lIns="0" tIns="0" rIns="0" bIns="0" rtlCol="0" anchor="t"/>
           <a:lstStyle/>
           <a:p>
-            <a:pPr indent="0" marL="0">
+            <a:pPr marL="0" indent="0">
               <a:buNone/>
             </a:pPr>
             <a:r>
@@ -6884,7 +6706,10 @@
         </p:spPr>
         <p:txBody>
           <a:bodyPr anchor="t"/>
-          <a:p/>
+          <a:lstStyle/>
+          <a:p>
+            <a:endParaRPr/>
+          </a:p>
         </p:txBody>
       </p:sp>
       <p:sp>
@@ -6908,7 +6733,7 @@
           <a:bodyPr wrap="square" lIns="0" tIns="0" rIns="0" bIns="0" rtlCol="0" anchor="t"/>
           <a:lstStyle/>
           <a:p>
-            <a:pPr indent="0" marL="0">
+            <a:pPr marL="0" indent="0">
               <a:buNone/>
             </a:pPr>
             <a:r>
@@ -6947,7 +6772,7 @@
           <a:bodyPr wrap="square" lIns="0" tIns="0" rIns="0" bIns="0" rtlCol="0" anchor="t"/>
           <a:lstStyle/>
           <a:p>
-            <a:pPr indent="0" marL="0">
+            <a:pPr marL="0" indent="0">
               <a:buNone/>
             </a:pPr>
             <a:r>
@@ -6986,7 +6811,7 @@
           <a:bodyPr wrap="square" lIns="0" tIns="0" rIns="0" bIns="0" rtlCol="0" anchor="t"/>
           <a:lstStyle/>
           <a:p>
-            <a:pPr indent="0" marL="0">
+            <a:pPr marL="0" indent="0">
               <a:buNone/>
             </a:pPr>
             <a:r>
@@ -7025,7 +6850,7 @@
           <a:bodyPr wrap="square" lIns="0" tIns="0" rIns="0" bIns="0" rtlCol="0" anchor="t"/>
           <a:lstStyle/>
           <a:p>
-            <a:pPr indent="0" marL="0">
+            <a:pPr marL="0" indent="0">
               <a:buNone/>
             </a:pPr>
             <a:r>
@@ -7071,7 +6896,10 @@
         </p:spPr>
         <p:txBody>
           <a:bodyPr anchor="t"/>
-          <a:p/>
+          <a:lstStyle/>
+          <a:p>
+            <a:endParaRPr/>
+          </a:p>
         </p:txBody>
       </p:sp>
       <p:sp>
@@ -7095,7 +6923,7 @@
           <a:bodyPr wrap="square" lIns="0" tIns="0" rIns="0" bIns="0" rtlCol="0" anchor="t"/>
           <a:lstStyle/>
           <a:p>
-            <a:pPr indent="0" marL="0">
+            <a:pPr marL="0" indent="0">
               <a:buNone/>
             </a:pPr>
             <a:r>
@@ -7134,7 +6962,7 @@
           <a:bodyPr wrap="square" lIns="0" tIns="0" rIns="0" bIns="0" rtlCol="0" anchor="t"/>
           <a:lstStyle/>
           <a:p>
-            <a:pPr indent="0" marL="0">
+            <a:pPr marL="0" indent="0">
               <a:buNone/>
             </a:pPr>
             <a:r>
@@ -7173,7 +7001,7 @@
           <a:bodyPr wrap="square" lIns="0" tIns="0" rIns="0" bIns="0" rtlCol="0" anchor="t"/>
           <a:lstStyle/>
           <a:p>
-            <a:pPr indent="0" marL="0">
+            <a:pPr marL="0" indent="0">
               <a:buNone/>
             </a:pPr>
             <a:r>
@@ -7212,7 +7040,7 @@
           <a:bodyPr wrap="square" lIns="0" tIns="0" rIns="0" bIns="0" rtlCol="0" anchor="t"/>
           <a:lstStyle/>
           <a:p>
-            <a:pPr indent="0" marL="0">
+            <a:pPr marL="0" indent="0">
               <a:buNone/>
             </a:pPr>
             <a:r>
@@ -7258,7 +7086,10 @@
         </p:spPr>
         <p:txBody>
           <a:bodyPr anchor="t"/>
-          <a:p/>
+          <a:lstStyle/>
+          <a:p>
+            <a:endParaRPr/>
+          </a:p>
         </p:txBody>
       </p:sp>
       <p:sp>
@@ -7282,7 +7113,7 @@
           <a:bodyPr wrap="square" lIns="0" tIns="0" rIns="0" bIns="0" rtlCol="0" anchor="t"/>
           <a:lstStyle/>
           <a:p>
-            <a:pPr indent="0" marL="0">
+            <a:pPr marL="0" indent="0">
               <a:buNone/>
             </a:pPr>
             <a:r>
@@ -7321,7 +7152,7 @@
           <a:bodyPr wrap="square" lIns="0" tIns="0" rIns="0" bIns="0" rtlCol="0" anchor="t"/>
           <a:lstStyle/>
           <a:p>
-            <a:pPr indent="0" marL="0">
+            <a:pPr marL="0" indent="0">
               <a:buNone/>
             </a:pPr>
             <a:r>
@@ -7360,7 +7191,7 @@
           <a:bodyPr wrap="square" lIns="0" tIns="0" rIns="0" bIns="0" rtlCol="0" anchor="t"/>
           <a:lstStyle/>
           <a:p>
-            <a:pPr indent="0" marL="0">
+            <a:pPr marL="0" indent="0">
               <a:buNone/>
             </a:pPr>
             <a:r>
@@ -7399,7 +7230,7 @@
           <a:bodyPr wrap="square" lIns="0" tIns="0" rIns="0" bIns="0" rtlCol="0" anchor="t"/>
           <a:lstStyle/>
           <a:p>
-            <a:pPr indent="0" marL="0">
+            <a:pPr marL="0" indent="0">
               <a:buNone/>
             </a:pPr>
             <a:r>
@@ -7445,7 +7276,10 @@
         </p:spPr>
         <p:txBody>
           <a:bodyPr anchor="t"/>
-          <a:p/>
+          <a:lstStyle/>
+          <a:p>
+            <a:endParaRPr/>
+          </a:p>
         </p:txBody>
       </p:sp>
       <p:sp>
@@ -7469,7 +7303,7 @@
           <a:bodyPr wrap="square" lIns="0" tIns="0" rIns="0" bIns="0" rtlCol="0" anchor="t"/>
           <a:lstStyle/>
           <a:p>
-            <a:pPr indent="0" marL="0">
+            <a:pPr marL="0" indent="0">
               <a:buNone/>
             </a:pPr>
             <a:r>
@@ -7508,7 +7342,7 @@
           <a:bodyPr wrap="square" lIns="0" tIns="0" rIns="0" bIns="0" rtlCol="0" anchor="t"/>
           <a:lstStyle/>
           <a:p>
-            <a:pPr indent="0" marL="0">
+            <a:pPr marL="0" indent="0">
               <a:buNone/>
             </a:pPr>
             <a:r>
@@ -7547,7 +7381,7 @@
           <a:bodyPr wrap="square" lIns="0" tIns="0" rIns="0" bIns="0" rtlCol="0" anchor="t"/>
           <a:lstStyle/>
           <a:p>
-            <a:pPr indent="0" marL="0">
+            <a:pPr marL="0" indent="0">
               <a:buNone/>
             </a:pPr>
             <a:r>
@@ -7586,7 +7420,7 @@
           <a:bodyPr wrap="square" lIns="0" tIns="0" rIns="0" bIns="0" rtlCol="0" anchor="t"/>
           <a:lstStyle/>
           <a:p>
-            <a:pPr indent="0" marL="0">
+            <a:pPr marL="0" indent="0">
               <a:buNone/>
             </a:pPr>
             <a:r>
@@ -7625,7 +7459,7 @@
           <a:bodyPr wrap="square" lIns="0" tIns="0" rIns="0" bIns="0" rtlCol="0" anchor="t"/>
           <a:lstStyle/>
           <a:p>
-            <a:pPr algn="r" indent="0" marL="0">
+            <a:pPr marL="0" indent="0" algn="r">
               <a:buNone/>
             </a:pPr>
             <a:r>
@@ -7659,6 +7493,7 @@
         <a:solidFill>
           <a:srgbClr val="0B1220"/>
         </a:solidFill>
+        <a:effectLst/>
       </p:bgPr>
     </p:bg>
     <p:spTree>
@@ -7696,7 +7531,7 @@
           <a:bodyPr wrap="square" lIns="0" tIns="0" rIns="0" bIns="0" rtlCol="0" anchor="t"/>
           <a:lstStyle/>
           <a:p>
-            <a:pPr indent="0" marL="0">
+            <a:pPr marL="0" indent="0">
               <a:buNone/>
             </a:pPr>
             <a:r>
@@ -7716,14 +7551,14 @@
       </p:sp>
       <p:pic>
         <p:nvPicPr>
-          <p:cNvPr id="3" name="Image 0" descr="logo.png">    </p:cNvPr>
+          <p:cNvPr id="3" name="Image 0" descr="logo.png"/>
           <p:cNvPicPr>
             <a:picLocks noChangeAspect="1"/>
           </p:cNvPicPr>
           <p:nvPr/>
         </p:nvPicPr>
         <p:blipFill>
-          <a:blip r:embed="rId1"/>
+          <a:blip r:embed="rId3"/>
           <a:stretch>
             <a:fillRect/>
           </a:stretch>
@@ -7759,7 +7594,7 @@
           <a:bodyPr wrap="square" lIns="0" tIns="0" rIns="0" bIns="0" rtlCol="0" anchor="t"/>
           <a:lstStyle/>
           <a:p>
-            <a:pPr indent="0" marL="0">
+            <a:pPr marL="0" indent="0">
               <a:buNone/>
             </a:pPr>
             <a:r>
@@ -7805,7 +7640,10 @@
         </p:spPr>
         <p:txBody>
           <a:bodyPr anchor="t"/>
-          <a:p/>
+          <a:lstStyle/>
+          <a:p>
+            <a:endParaRPr/>
+          </a:p>
         </p:txBody>
       </p:sp>
       <p:sp>
@@ -7829,11 +7667,11 @@
           <a:bodyPr wrap="square" lIns="0" tIns="0" rIns="0" bIns="0" rtlCol="0" anchor="t"/>
           <a:lstStyle/>
           <a:p>
-            <a:pPr indent="0" marL="0">
-              <a:buNone/>
-            </a:pPr>
-            <a:r>
-              <a:rPr lang="en-US" sz="1050" b="1" spc="150" kern="0" dirty="0">
+            <a:pPr marL="0" indent="0">
+              <a:buNone/>
+            </a:pPr>
+            <a:r>
+              <a:rPr lang="en-US" sz="1050" b="1" kern="0" spc="150" dirty="0">
                 <a:solidFill>
                   <a:srgbClr val="34D399"/>
                 </a:solidFill>
@@ -7868,7 +7706,7 @@
           <a:bodyPr wrap="square" lIns="0" tIns="0" rIns="0" bIns="0" rtlCol="0" anchor="t"/>
           <a:lstStyle/>
           <a:p>
-            <a:pPr indent="0" marL="0">
+            <a:pPr marL="0" indent="0">
               <a:buNone/>
             </a:pPr>
             <a:r>
@@ -7907,7 +7745,7 @@
           <a:bodyPr wrap="square" lIns="0" tIns="0" rIns="0" bIns="0" rtlCol="0" anchor="t"/>
           <a:lstStyle/>
           <a:p>
-            <a:pPr indent="0" marL="0">
+            <a:pPr marL="0" indent="0">
               <a:buNone/>
             </a:pPr>
             <a:r>
@@ -7946,7 +7784,7 @@
           <a:bodyPr wrap="square" lIns="0" tIns="0" rIns="0" bIns="0" rtlCol="0" anchor="t"/>
           <a:lstStyle/>
           <a:p>
-            <a:pPr indent="0" marL="0">
+            <a:pPr marL="0" indent="0">
               <a:buNone/>
             </a:pPr>
             <a:r>
@@ -7992,7 +7830,10 @@
         </p:spPr>
         <p:txBody>
           <a:bodyPr anchor="t"/>
-          <a:p/>
+          <a:lstStyle/>
+          <a:p>
+            <a:endParaRPr/>
+          </a:p>
         </p:txBody>
       </p:sp>
       <p:sp>
@@ -8016,11 +7857,11 @@
           <a:bodyPr wrap="square" lIns="0" tIns="0" rIns="0" bIns="0" rtlCol="0" anchor="t"/>
           <a:lstStyle/>
           <a:p>
-            <a:pPr indent="0" marL="0">
-              <a:buNone/>
-            </a:pPr>
-            <a:r>
-              <a:rPr lang="en-US" sz="1050" b="1" spc="150" kern="0" dirty="0">
+            <a:pPr marL="0" indent="0">
+              <a:buNone/>
+            </a:pPr>
+            <a:r>
+              <a:rPr lang="en-US" sz="1050" b="1" kern="0" spc="150" dirty="0">
                 <a:solidFill>
                   <a:srgbClr val="34D399"/>
                 </a:solidFill>
@@ -8055,7 +7896,7 @@
           <a:bodyPr wrap="square" lIns="0" tIns="0" rIns="0" bIns="0" rtlCol="0" anchor="t"/>
           <a:lstStyle/>
           <a:p>
-            <a:pPr indent="0" marL="0">
+            <a:pPr marL="0" indent="0">
               <a:buNone/>
             </a:pPr>
             <a:r>
@@ -8094,7 +7935,7 @@
           <a:bodyPr wrap="square" lIns="0" tIns="0" rIns="0" bIns="0" rtlCol="0" anchor="t"/>
           <a:lstStyle/>
           <a:p>
-            <a:pPr indent="0" marL="0">
+            <a:pPr marL="0" indent="0">
               <a:buNone/>
             </a:pPr>
             <a:r>
@@ -8133,7 +7974,7 @@
           <a:bodyPr wrap="square" lIns="0" tIns="0" rIns="0" bIns="0" rtlCol="0" anchor="t"/>
           <a:lstStyle/>
           <a:p>
-            <a:pPr indent="0" marL="0">
+            <a:pPr marL="0" indent="0">
               <a:buNone/>
             </a:pPr>
             <a:r>
@@ -8179,7 +8020,10 @@
         </p:spPr>
         <p:txBody>
           <a:bodyPr anchor="t"/>
-          <a:p/>
+          <a:lstStyle/>
+          <a:p>
+            <a:endParaRPr/>
+          </a:p>
         </p:txBody>
       </p:sp>
       <p:sp>
@@ -8203,11 +8047,11 @@
           <a:bodyPr wrap="square" lIns="0" tIns="0" rIns="0" bIns="0" rtlCol="0" anchor="t"/>
           <a:lstStyle/>
           <a:p>
-            <a:pPr indent="0" marL="0">
-              <a:buNone/>
-            </a:pPr>
-            <a:r>
-              <a:rPr lang="en-US" sz="1050" b="1" spc="150" kern="0" dirty="0">
+            <a:pPr marL="0" indent="0">
+              <a:buNone/>
+            </a:pPr>
+            <a:r>
+              <a:rPr lang="en-US" sz="1050" b="1" kern="0" spc="150" dirty="0">
                 <a:solidFill>
                   <a:srgbClr val="34D399"/>
                 </a:solidFill>
@@ -8242,7 +8086,7 @@
           <a:bodyPr wrap="square" lIns="0" tIns="0" rIns="0" bIns="0" rtlCol="0" anchor="t"/>
           <a:lstStyle/>
           <a:p>
-            <a:pPr indent="0" marL="0">
+            <a:pPr marL="0" indent="0">
               <a:buNone/>
             </a:pPr>
             <a:r>
@@ -8281,7 +8125,7 @@
           <a:bodyPr wrap="square" lIns="0" tIns="0" rIns="0" bIns="0" rtlCol="0" anchor="t"/>
           <a:lstStyle/>
           <a:p>
-            <a:pPr indent="0" marL="0">
+            <a:pPr marL="0" indent="0">
               <a:buNone/>
             </a:pPr>
             <a:r>
@@ -8320,7 +8164,7 @@
           <a:bodyPr wrap="square" lIns="0" tIns="0" rIns="0" bIns="0" rtlCol="0" anchor="t"/>
           <a:lstStyle/>
           <a:p>
-            <a:pPr indent="0" marL="0">
+            <a:pPr marL="0" indent="0">
               <a:buNone/>
             </a:pPr>
             <a:r>
@@ -8366,7 +8210,10 @@
         </p:spPr>
         <p:txBody>
           <a:bodyPr anchor="t"/>
-          <a:p/>
+          <a:lstStyle/>
+          <a:p>
+            <a:endParaRPr/>
+          </a:p>
         </p:txBody>
       </p:sp>
       <p:sp>
@@ -8390,11 +8237,11 @@
           <a:bodyPr wrap="square" lIns="0" tIns="0" rIns="0" bIns="0" rtlCol="0" anchor="t"/>
           <a:lstStyle/>
           <a:p>
-            <a:pPr indent="0" marL="0">
-              <a:buNone/>
-            </a:pPr>
-            <a:r>
-              <a:rPr lang="en-US" sz="1050" b="1" spc="150" kern="0" dirty="0">
+            <a:pPr marL="0" indent="0">
+              <a:buNone/>
+            </a:pPr>
+            <a:r>
+              <a:rPr lang="en-US" sz="1050" b="1" kern="0" spc="150" dirty="0">
                 <a:solidFill>
                   <a:srgbClr val="34D399"/>
                 </a:solidFill>
@@ -8429,7 +8276,7 @@
           <a:bodyPr wrap="square" lIns="0" tIns="0" rIns="0" bIns="0" rtlCol="0" anchor="t"/>
           <a:lstStyle/>
           <a:p>
-            <a:pPr indent="0" marL="0">
+            <a:pPr marL="0" indent="0">
               <a:buNone/>
             </a:pPr>
             <a:r>
@@ -8468,7 +8315,7 @@
           <a:bodyPr wrap="square" lIns="0" tIns="0" rIns="0" bIns="0" rtlCol="0" anchor="t"/>
           <a:lstStyle/>
           <a:p>
-            <a:pPr indent="0" marL="0">
+            <a:pPr marL="0" indent="0">
               <a:buNone/>
             </a:pPr>
             <a:r>
@@ -8507,7 +8354,7 @@
           <a:bodyPr wrap="square" lIns="0" tIns="0" rIns="0" bIns="0" rtlCol="0" anchor="t"/>
           <a:lstStyle/>
           <a:p>
-            <a:pPr indent="0" marL="0">
+            <a:pPr marL="0" indent="0">
               <a:buNone/>
             </a:pPr>
             <a:r>
@@ -8553,7 +8400,10 @@
         </p:spPr>
         <p:txBody>
           <a:bodyPr anchor="t"/>
-          <a:p/>
+          <a:lstStyle/>
+          <a:p>
+            <a:endParaRPr/>
+          </a:p>
         </p:txBody>
       </p:sp>
       <p:sp>
@@ -8577,7 +8427,7 @@
           <a:bodyPr wrap="square" lIns="0" tIns="0" rIns="0" bIns="0" rtlCol="0" anchor="t"/>
           <a:lstStyle/>
           <a:p>
-            <a:pPr indent="0" marL="0">
+            <a:pPr marL="0" indent="0">
               <a:buNone/>
             </a:pPr>
             <a:r>
@@ -8616,7 +8466,7 @@
           <a:bodyPr wrap="square" lIns="0" tIns="0" rIns="0" bIns="0" rtlCol="0" anchor="t"/>
           <a:lstStyle/>
           <a:p>
-            <a:pPr indent="0" marL="0">
+            <a:pPr marL="0" indent="0">
               <a:buNone/>
             </a:pPr>
             <a:r>
@@ -8655,7 +8505,7 @@
           <a:bodyPr wrap="square" lIns="0" tIns="0" rIns="0" bIns="0" rtlCol="0" anchor="t"/>
           <a:lstStyle/>
           <a:p>
-            <a:pPr algn="r" indent="0" marL="0">
+            <a:pPr marL="0" indent="0" algn="r">
               <a:buNone/>
             </a:pPr>
             <a:r>
@@ -8689,6 +8539,7 @@
         <a:solidFill>
           <a:srgbClr val="0B1220"/>
         </a:solidFill>
+        <a:effectLst/>
       </p:bgPr>
     </p:bg>
     <p:spTree>
@@ -8726,7 +8577,7 @@
           <a:bodyPr wrap="square" lIns="0" tIns="0" rIns="0" bIns="0" rtlCol="0" anchor="t"/>
           <a:lstStyle/>
           <a:p>
-            <a:pPr indent="0" marL="0">
+            <a:pPr marL="0" indent="0">
               <a:buNone/>
             </a:pPr>
             <a:r>
@@ -8746,14 +8597,14 @@
       </p:sp>
       <p:pic>
         <p:nvPicPr>
-          <p:cNvPr id="3" name="Image 0" descr="logo.png">    </p:cNvPr>
+          <p:cNvPr id="3" name="Image 0" descr="logo.png"/>
           <p:cNvPicPr>
             <a:picLocks noChangeAspect="1"/>
           </p:cNvPicPr>
           <p:nvPr/>
         </p:nvPicPr>
         <p:blipFill>
-          <a:blip r:embed="rId1"/>
+          <a:blip r:embed="rId3"/>
           <a:stretch>
             <a:fillRect/>
           </a:stretch>
@@ -8789,7 +8640,7 @@
           <a:bodyPr wrap="square" lIns="0" tIns="0" rIns="0" bIns="0" rtlCol="0" anchor="t"/>
           <a:lstStyle/>
           <a:p>
-            <a:pPr indent="0" marL="0">
+            <a:pPr marL="0" indent="0">
               <a:buNone/>
             </a:pPr>
             <a:r>
@@ -8830,12 +8681,48 @@
             <a:tbl>
               <a:tblPr/>
               <a:tblGrid>
-                <a:gridCol w="1554480"/>
-                <a:gridCol w="1005840"/>
-                <a:gridCol w="1051560"/>
-                <a:gridCol w="1051560"/>
-                <a:gridCol w="1143000"/>
-                <a:gridCol w="960120"/>
+                <a:gridCol w="1554480">
+                  <a:extLst>
+                    <a:ext uri="{9D8B030D-6E8A-4147-A177-3AD203B41FA5}">
+                      <a16:colId xmlns:a16="http://schemas.microsoft.com/office/drawing/2014/main" val="20000"/>
+                    </a:ext>
+                  </a:extLst>
+                </a:gridCol>
+                <a:gridCol w="1005840">
+                  <a:extLst>
+                    <a:ext uri="{9D8B030D-6E8A-4147-A177-3AD203B41FA5}">
+                      <a16:colId xmlns:a16="http://schemas.microsoft.com/office/drawing/2014/main" val="20001"/>
+                    </a:ext>
+                  </a:extLst>
+                </a:gridCol>
+                <a:gridCol w="1051560">
+                  <a:extLst>
+                    <a:ext uri="{9D8B030D-6E8A-4147-A177-3AD203B41FA5}">
+                      <a16:colId xmlns:a16="http://schemas.microsoft.com/office/drawing/2014/main" val="20002"/>
+                    </a:ext>
+                  </a:extLst>
+                </a:gridCol>
+                <a:gridCol w="1051560">
+                  <a:extLst>
+                    <a:ext uri="{9D8B030D-6E8A-4147-A177-3AD203B41FA5}">
+                      <a16:colId xmlns:a16="http://schemas.microsoft.com/office/drawing/2014/main" val="20003"/>
+                    </a:ext>
+                  </a:extLst>
+                </a:gridCol>
+                <a:gridCol w="1143000">
+                  <a:extLst>
+                    <a:ext uri="{9D8B030D-6E8A-4147-A177-3AD203B41FA5}">
+                      <a16:colId xmlns:a16="http://schemas.microsoft.com/office/drawing/2014/main" val="20004"/>
+                    </a:ext>
+                  </a:extLst>
+                </a:gridCol>
+                <a:gridCol w="960120">
+                  <a:extLst>
+                    <a:ext uri="{9D8B030D-6E8A-4147-A177-3AD203B41FA5}">
+                      <a16:colId xmlns:a16="http://schemas.microsoft.com/office/drawing/2014/main" val="20005"/>
+                    </a:ext>
+                  </a:extLst>
+                </a:gridCol>
               </a:tblGrid>
               <a:tr h="603504">
                 <a:tc>
@@ -8843,7 +8730,7 @@
                     <a:bodyPr/>
                     <a:lstStyle/>
                     <a:p>
-                      <a:pPr indent="0" marL="0">
+                      <a:pPr marL="0" indent="0">
                         <a:buNone/>
                       </a:pPr>
                       <a:r>
@@ -8911,7 +8798,7 @@
                     <a:bodyPr/>
                     <a:lstStyle/>
                     <a:p>
-                      <a:pPr indent="0" marL="0">
+                      <a:pPr marL="0" indent="0">
                         <a:buNone/>
                       </a:pPr>
                       <a:r>
@@ -8979,7 +8866,7 @@
                     <a:bodyPr/>
                     <a:lstStyle/>
                     <a:p>
-                      <a:pPr indent="0" marL="0">
+                      <a:pPr marL="0" indent="0">
                         <a:buNone/>
                       </a:pPr>
                       <a:r>
@@ -9047,7 +8934,7 @@
                     <a:bodyPr/>
                     <a:lstStyle/>
                     <a:p>
-                      <a:pPr indent="0" marL="0">
+                      <a:pPr marL="0" indent="0">
                         <a:buNone/>
                       </a:pPr>
                       <a:r>
@@ -9115,7 +9002,7 @@
                     <a:bodyPr/>
                     <a:lstStyle/>
                     <a:p>
-                      <a:pPr indent="0" marL="0">
+                      <a:pPr marL="0" indent="0">
                         <a:buNone/>
                       </a:pPr>
                       <a:r>
@@ -9183,7 +9070,7 @@
                     <a:bodyPr/>
                     <a:lstStyle/>
                     <a:p>
-                      <a:pPr indent="0" marL="0">
+                      <a:pPr marL="0" indent="0">
                         <a:buNone/>
                       </a:pPr>
                       <a:r>
@@ -9246,6 +9133,11 @@
                     </a:solidFill>
                   </a:tcPr>
                 </a:tc>
+                <a:extLst>
+                  <a:ext uri="{0D108BD9-81ED-4DB2-BD59-A6C34878D82A}">
+                    <a16:rowId xmlns:a16="http://schemas.microsoft.com/office/drawing/2014/main" val="10000"/>
+                  </a:ext>
+                </a:extLst>
               </a:tr>
               <a:tr h="603504">
                 <a:tc>
@@ -9253,7 +9145,7 @@
                     <a:bodyPr/>
                     <a:lstStyle/>
                     <a:p>
-                      <a:pPr indent="0" marL="0">
+                      <a:pPr marL="0" indent="0">
                         <a:buNone/>
                       </a:pPr>
                       <a:r>
@@ -9321,7 +9213,7 @@
                     <a:bodyPr/>
                     <a:lstStyle/>
                     <a:p>
-                      <a:pPr indent="0" marL="0">
+                      <a:pPr marL="0" indent="0">
                         <a:buNone/>
                       </a:pPr>
                       <a:r>
@@ -9389,7 +9281,7 @@
                     <a:bodyPr/>
                     <a:lstStyle/>
                     <a:p>
-                      <a:pPr indent="0" marL="0">
+                      <a:pPr marL="0" indent="0">
                         <a:buNone/>
                       </a:pPr>
                       <a:r>
@@ -9457,7 +9349,7 @@
                     <a:bodyPr/>
                     <a:lstStyle/>
                     <a:p>
-                      <a:pPr indent="0" marL="0">
+                      <a:pPr marL="0" indent="0">
                         <a:buNone/>
                       </a:pPr>
                       <a:r>
@@ -9525,7 +9417,7 @@
                     <a:bodyPr/>
                     <a:lstStyle/>
                     <a:p>
-                      <a:pPr indent="0" marL="0">
+                      <a:pPr marL="0" indent="0">
                         <a:buNone/>
                       </a:pPr>
                       <a:r>
@@ -9593,7 +9485,7 @@
                     <a:bodyPr/>
                     <a:lstStyle/>
                     <a:p>
-                      <a:pPr indent="0" marL="0">
+                      <a:pPr marL="0" indent="0">
                         <a:buNone/>
                       </a:pPr>
                       <a:r>
@@ -9656,6 +9548,11 @@
                     </a:solidFill>
                   </a:tcPr>
                 </a:tc>
+                <a:extLst>
+                  <a:ext uri="{0D108BD9-81ED-4DB2-BD59-A6C34878D82A}">
+                    <a16:rowId xmlns:a16="http://schemas.microsoft.com/office/drawing/2014/main" val="10001"/>
+                  </a:ext>
+                </a:extLst>
               </a:tr>
               <a:tr h="603504">
                 <a:tc>
@@ -9663,7 +9560,7 @@
                     <a:bodyPr/>
                     <a:lstStyle/>
                     <a:p>
-                      <a:pPr indent="0" marL="0">
+                      <a:pPr marL="0" indent="0">
                         <a:buNone/>
                       </a:pPr>
                       <a:r>
@@ -9731,7 +9628,7 @@
                     <a:bodyPr/>
                     <a:lstStyle/>
                     <a:p>
-                      <a:pPr indent="0" marL="0">
+                      <a:pPr marL="0" indent="0">
                         <a:buNone/>
                       </a:pPr>
                       <a:r>
@@ -9799,7 +9696,7 @@
                     <a:bodyPr/>
                     <a:lstStyle/>
                     <a:p>
-                      <a:pPr indent="0" marL="0">
+                      <a:pPr marL="0" indent="0">
                         <a:buNone/>
                       </a:pPr>
                       <a:r>
@@ -9867,7 +9764,7 @@
                     <a:bodyPr/>
                     <a:lstStyle/>
                     <a:p>
-                      <a:pPr indent="0" marL="0">
+                      <a:pPr marL="0" indent="0">
                         <a:buNone/>
                       </a:pPr>
                       <a:r>
@@ -9935,7 +9832,7 @@
                     <a:bodyPr/>
                     <a:lstStyle/>
                     <a:p>
-                      <a:pPr indent="0" marL="0">
+                      <a:pPr marL="0" indent="0">
                         <a:buNone/>
                       </a:pPr>
                       <a:r>
@@ -10003,7 +9900,7 @@
                     <a:bodyPr/>
                     <a:lstStyle/>
                     <a:p>
-                      <a:pPr indent="0" marL="0">
+                      <a:pPr marL="0" indent="0">
                         <a:buNone/>
                       </a:pPr>
                       <a:r>
@@ -10066,6 +9963,11 @@
                     </a:solidFill>
                   </a:tcPr>
                 </a:tc>
+                <a:extLst>
+                  <a:ext uri="{0D108BD9-81ED-4DB2-BD59-A6C34878D82A}">
+                    <a16:rowId xmlns:a16="http://schemas.microsoft.com/office/drawing/2014/main" val="10002"/>
+                  </a:ext>
+                </a:extLst>
               </a:tr>
               <a:tr h="603504">
                 <a:tc>
@@ -10073,7 +9975,7 @@
                     <a:bodyPr/>
                     <a:lstStyle/>
                     <a:p>
-                      <a:pPr indent="0" marL="0">
+                      <a:pPr marL="0" indent="0">
                         <a:buNone/>
                       </a:pPr>
                       <a:r>
@@ -10141,7 +10043,7 @@
                     <a:bodyPr/>
                     <a:lstStyle/>
                     <a:p>
-                      <a:pPr indent="0" marL="0">
+                      <a:pPr marL="0" indent="0">
                         <a:buNone/>
                       </a:pPr>
                       <a:r>
@@ -10209,7 +10111,7 @@
                     <a:bodyPr/>
                     <a:lstStyle/>
                     <a:p>
-                      <a:pPr indent="0" marL="0">
+                      <a:pPr marL="0" indent="0">
                         <a:buNone/>
                       </a:pPr>
                       <a:r>
@@ -10277,7 +10179,7 @@
                     <a:bodyPr/>
                     <a:lstStyle/>
                     <a:p>
-                      <a:pPr indent="0" marL="0">
+                      <a:pPr marL="0" indent="0">
                         <a:buNone/>
                       </a:pPr>
                       <a:r>
@@ -10345,7 +10247,7 @@
                     <a:bodyPr/>
                     <a:lstStyle/>
                     <a:p>
-                      <a:pPr indent="0" marL="0">
+                      <a:pPr marL="0" indent="0">
                         <a:buNone/>
                       </a:pPr>
                       <a:r>
@@ -10413,7 +10315,7 @@
                     <a:bodyPr/>
                     <a:lstStyle/>
                     <a:p>
-                      <a:pPr indent="0" marL="0">
+                      <a:pPr marL="0" indent="0">
                         <a:buNone/>
                       </a:pPr>
                       <a:r>
@@ -10476,6 +10378,11 @@
                     </a:solidFill>
                   </a:tcPr>
                 </a:tc>
+                <a:extLst>
+                  <a:ext uri="{0D108BD9-81ED-4DB2-BD59-A6C34878D82A}">
+                    <a16:rowId xmlns:a16="http://schemas.microsoft.com/office/drawing/2014/main" val="10003"/>
+                  </a:ext>
+                </a:extLst>
               </a:tr>
               <a:tr h="603504">
                 <a:tc>
@@ -10483,7 +10390,7 @@
                     <a:bodyPr/>
                     <a:lstStyle/>
                     <a:p>
-                      <a:pPr indent="0" marL="0">
+                      <a:pPr marL="0" indent="0">
                         <a:buNone/>
                       </a:pPr>
                       <a:r>
@@ -10551,7 +10458,7 @@
                     <a:bodyPr/>
                     <a:lstStyle/>
                     <a:p>
-                      <a:pPr indent="0" marL="0">
+                      <a:pPr marL="0" indent="0">
                         <a:buNone/>
                       </a:pPr>
                       <a:r>
@@ -10619,7 +10526,7 @@
                     <a:bodyPr/>
                     <a:lstStyle/>
                     <a:p>
-                      <a:pPr indent="0" marL="0">
+                      <a:pPr marL="0" indent="0">
                         <a:buNone/>
                       </a:pPr>
                       <a:r>
@@ -10687,7 +10594,7 @@
                     <a:bodyPr/>
                     <a:lstStyle/>
                     <a:p>
-                      <a:pPr indent="0" marL="0">
+                      <a:pPr marL="0" indent="0">
                         <a:buNone/>
                       </a:pPr>
                       <a:r>
@@ -10755,7 +10662,7 @@
                     <a:bodyPr/>
                     <a:lstStyle/>
                     <a:p>
-                      <a:pPr indent="0" marL="0">
+                      <a:pPr marL="0" indent="0">
                         <a:buNone/>
                       </a:pPr>
                       <a:r>
@@ -10823,7 +10730,7 @@
                     <a:bodyPr/>
                     <a:lstStyle/>
                     <a:p>
-                      <a:pPr indent="0" marL="0">
+                      <a:pPr marL="0" indent="0">
                         <a:buNone/>
                       </a:pPr>
                       <a:r>
@@ -10886,6 +10793,11 @@
                     </a:solidFill>
                   </a:tcPr>
                 </a:tc>
+                <a:extLst>
+                  <a:ext uri="{0D108BD9-81ED-4DB2-BD59-A6C34878D82A}">
+                    <a16:rowId xmlns:a16="http://schemas.microsoft.com/office/drawing/2014/main" val="10004"/>
+                  </a:ext>
+                </a:extLst>
               </a:tr>
             </a:tbl>
           </a:graphicData>
@@ -10893,7 +10805,7 @@
       </p:graphicFrame>
       <p:sp>
         <p:nvSpPr>
-          <p:cNvPr id="6" name="Shape 2"/>
+          <p:cNvPr id="5" name="Shape 2"/>
           <p:cNvSpPr/>
           <p:nvPr/>
         </p:nvSpPr>
@@ -10919,7 +10831,10 @@
         </p:spPr>
         <p:txBody>
           <a:bodyPr anchor="t"/>
-          <a:p/>
+          <a:lstStyle/>
+          <a:p>
+            <a:endParaRPr/>
+          </a:p>
         </p:txBody>
       </p:sp>
       <p:sp>
@@ -10943,7 +10858,7 @@
           <a:bodyPr wrap="square" lIns="0" tIns="0" rIns="0" bIns="0" rtlCol="0" anchor="t"/>
           <a:lstStyle/>
           <a:p>
-            <a:pPr indent="0" marL="0">
+            <a:pPr marL="0" indent="0">
               <a:buNone/>
             </a:pPr>
             <a:r>
@@ -10982,7 +10897,7 @@
           <a:bodyPr wrap="square" lIns="0" tIns="0" rIns="0" bIns="0" rtlCol="0" anchor="t"/>
           <a:lstStyle/>
           <a:p>
-            <a:pPr indent="0" marL="0">
+            <a:pPr marL="0" indent="0">
               <a:buNone/>
             </a:pPr>
             <a:r>
@@ -11021,7 +10936,7 @@
           <a:bodyPr wrap="square" lIns="0" tIns="0" rIns="0" bIns="0" rtlCol="0" anchor="t"/>
           <a:lstStyle/>
           <a:p>
-            <a:pPr indent="0" marL="0">
+            <a:pPr marL="0" indent="0">
               <a:buNone/>
             </a:pPr>
             <a:r>
@@ -11060,7 +10975,7 @@
           <a:bodyPr wrap="square" lIns="0" tIns="0" rIns="0" bIns="0" rtlCol="0" anchor="t"/>
           <a:lstStyle/>
           <a:p>
-            <a:pPr indent="0" marL="0">
+            <a:pPr marL="0" indent="0">
               <a:buNone/>
             </a:pPr>
             <a:r>
@@ -11099,7 +11014,7 @@
           <a:bodyPr wrap="square" lIns="0" tIns="0" rIns="0" bIns="0" rtlCol="0" anchor="t"/>
           <a:lstStyle/>
           <a:p>
-            <a:pPr indent="0" marL="0">
+            <a:pPr marL="0" indent="0">
               <a:buNone/>
             </a:pPr>
             <a:r>
@@ -11138,7 +11053,7 @@
           <a:bodyPr wrap="square" lIns="0" tIns="0" rIns="0" bIns="0" rtlCol="0" anchor="t"/>
           <a:lstStyle/>
           <a:p>
-            <a:pPr indent="0" marL="0">
+            <a:pPr marL="0" indent="0">
               <a:buNone/>
             </a:pPr>
             <a:r>
@@ -11177,7 +11092,7 @@
           <a:bodyPr wrap="square" lIns="0" tIns="0" rIns="0" bIns="0" rtlCol="0" anchor="t"/>
           <a:lstStyle/>
           <a:p>
-            <a:pPr indent="0" marL="0">
+            <a:pPr marL="0" indent="0">
               <a:buNone/>
             </a:pPr>
             <a:r>
@@ -11216,7 +11131,7 @@
           <a:bodyPr wrap="square" lIns="0" tIns="0" rIns="0" bIns="0" rtlCol="0" anchor="t"/>
           <a:lstStyle/>
           <a:p>
-            <a:pPr indent="0" marL="0">
+            <a:pPr marL="0" indent="0">
               <a:buNone/>
             </a:pPr>
             <a:r>
@@ -11255,7 +11170,7 @@
           <a:bodyPr wrap="square" lIns="0" tIns="0" rIns="0" bIns="0" rtlCol="0" anchor="t"/>
           <a:lstStyle/>
           <a:p>
-            <a:pPr indent="0" marL="0">
+            <a:pPr marL="0" indent="0">
               <a:buNone/>
             </a:pPr>
             <a:r>
@@ -11294,7 +11209,7 @@
           <a:bodyPr wrap="square" lIns="0" tIns="0" rIns="0" bIns="0" rtlCol="0" anchor="t"/>
           <a:lstStyle/>
           <a:p>
-            <a:pPr algn="r" indent="0" marL="0">
+            <a:pPr marL="0" indent="0" algn="r">
               <a:buNone/>
             </a:pPr>
             <a:r>
@@ -11328,6 +11243,7 @@
         <a:solidFill>
           <a:srgbClr val="0B1220"/>
         </a:solidFill>
+        <a:effectLst/>
       </p:bgPr>
     </p:bg>
     <p:spTree>
@@ -11365,7 +11281,7 @@
           <a:bodyPr wrap="square" lIns="0" tIns="0" rIns="0" bIns="0" rtlCol="0" anchor="t"/>
           <a:lstStyle/>
           <a:p>
-            <a:pPr indent="0" marL="0">
+            <a:pPr marL="0" indent="0">
               <a:buNone/>
             </a:pPr>
             <a:r>
@@ -11385,14 +11301,14 @@
       </p:sp>
       <p:pic>
         <p:nvPicPr>
-          <p:cNvPr id="3" name="Image 0" descr="logo.png">    </p:cNvPr>
+          <p:cNvPr id="3" name="Image 0" descr="logo.png"/>
           <p:cNvPicPr>
             <a:picLocks noChangeAspect="1"/>
           </p:cNvPicPr>
           <p:nvPr/>
         </p:nvPicPr>
         <p:blipFill>
-          <a:blip r:embed="rId1"/>
+          <a:blip r:embed="rId3"/>
           <a:stretch>
             <a:fillRect/>
           </a:stretch>
@@ -11428,7 +11344,7 @@
           <a:bodyPr wrap="square" lIns="0" tIns="0" rIns="0" bIns="0" rtlCol="0" anchor="t"/>
           <a:lstStyle/>
           <a:p>
-            <a:pPr indent="0" marL="0">
+            <a:pPr marL="0" indent="0">
               <a:buNone/>
             </a:pPr>
             <a:r>
@@ -11474,7 +11390,10 @@
         </p:spPr>
         <p:txBody>
           <a:bodyPr anchor="t"/>
-          <a:p/>
+          <a:lstStyle/>
+          <a:p>
+            <a:endParaRPr/>
+          </a:p>
         </p:txBody>
       </p:sp>
       <p:sp>
@@ -11498,7 +11417,7 @@
           <a:bodyPr wrap="square" lIns="0" tIns="0" rIns="0" bIns="0" rtlCol="0" anchor="t"/>
           <a:lstStyle/>
           <a:p>
-            <a:pPr indent="0" marL="0">
+            <a:pPr marL="0" indent="0">
               <a:buNone/>
             </a:pPr>
             <a:r>
@@ -11537,7 +11456,7 @@
           <a:bodyPr wrap="square" lIns="0" tIns="0" rIns="0" bIns="0" rtlCol="0" anchor="t"/>
           <a:lstStyle/>
           <a:p>
-            <a:pPr indent="0" marL="0">
+            <a:pPr marL="0" indent="0">
               <a:buNone/>
             </a:pPr>
             <a:r>
@@ -11576,7 +11495,7 @@
           <a:bodyPr wrap="square" lIns="0" tIns="0" rIns="0" bIns="0" rtlCol="0" anchor="t"/>
           <a:lstStyle/>
           <a:p>
-            <a:pPr indent="0" marL="0">
+            <a:pPr marL="0" indent="0">
               <a:buNone/>
             </a:pPr>
             <a:r>
@@ -11622,7 +11541,10 @@
         </p:spPr>
         <p:txBody>
           <a:bodyPr anchor="t"/>
-          <a:p/>
+          <a:lstStyle/>
+          <a:p>
+            <a:endParaRPr/>
+          </a:p>
         </p:txBody>
       </p:sp>
       <p:sp>
@@ -11646,7 +11568,7 @@
           <a:bodyPr wrap="square" lIns="0" tIns="0" rIns="0" bIns="0" rtlCol="0" anchor="t"/>
           <a:lstStyle/>
           <a:p>
-            <a:pPr indent="0" marL="0">
+            <a:pPr marL="0" indent="0">
               <a:buNone/>
             </a:pPr>
             <a:r>
@@ -11685,7 +11607,7 @@
           <a:bodyPr wrap="square" lIns="0" tIns="0" rIns="0" bIns="0" rtlCol="0" anchor="t"/>
           <a:lstStyle/>
           <a:p>
-            <a:pPr indent="0" marL="0">
+            <a:pPr marL="0" indent="0">
               <a:buNone/>
             </a:pPr>
             <a:r>
@@ -11724,7 +11646,7 @@
           <a:bodyPr wrap="square" lIns="0" tIns="0" rIns="0" bIns="0" rtlCol="0" anchor="t"/>
           <a:lstStyle/>
           <a:p>
-            <a:pPr indent="0" marL="0">
+            <a:pPr marL="0" indent="0">
               <a:buNone/>
             </a:pPr>
             <a:r>
@@ -11770,7 +11692,10 @@
         </p:spPr>
         <p:txBody>
           <a:bodyPr anchor="t"/>
-          <a:p/>
+          <a:lstStyle/>
+          <a:p>
+            <a:endParaRPr/>
+          </a:p>
         </p:txBody>
       </p:sp>
       <p:sp>
@@ -11794,7 +11719,7 @@
           <a:bodyPr wrap="square" lIns="0" tIns="0" rIns="0" bIns="0" rtlCol="0" anchor="t"/>
           <a:lstStyle/>
           <a:p>
-            <a:pPr indent="0" marL="0">
+            <a:pPr marL="0" indent="0">
               <a:buNone/>
             </a:pPr>
             <a:r>
@@ -11833,7 +11758,7 @@
           <a:bodyPr wrap="square" lIns="0" tIns="0" rIns="0" bIns="0" rtlCol="0" anchor="t"/>
           <a:lstStyle/>
           <a:p>
-            <a:pPr indent="0" marL="0">
+            <a:pPr marL="0" indent="0">
               <a:buNone/>
             </a:pPr>
             <a:r>
@@ -11872,7 +11797,7 @@
           <a:bodyPr wrap="square" lIns="0" tIns="0" rIns="0" bIns="0" rtlCol="0" anchor="t"/>
           <a:lstStyle/>
           <a:p>
-            <a:pPr indent="0" marL="0">
+            <a:pPr marL="0" indent="0">
               <a:buNone/>
             </a:pPr>
             <a:r>
@@ -11911,7 +11836,7 @@
           <a:bodyPr wrap="square" lIns="0" tIns="0" rIns="0" bIns="0" rtlCol="0" anchor="t"/>
           <a:lstStyle/>
           <a:p>
-            <a:pPr indent="0" marL="0">
+            <a:pPr marL="0" indent="0">
               <a:buNone/>
             </a:pPr>
             <a:r>
@@ -11950,7 +11875,7 @@
           <a:bodyPr wrap="square" lIns="0" tIns="0" rIns="0" bIns="0" rtlCol="0" anchor="t"/>
           <a:lstStyle/>
           <a:p>
-            <a:pPr algn="r" indent="0" marL="0">
+            <a:pPr marL="0" indent="0" algn="r">
               <a:buNone/>
             </a:pPr>
             <a:r>
@@ -11984,6 +11909,7 @@
         <a:solidFill>
           <a:srgbClr val="0B1220"/>
         </a:solidFill>
+        <a:effectLst/>
       </p:bgPr>
     </p:bg>
     <p:spTree>
@@ -12021,7 +11947,7 @@
           <a:bodyPr wrap="square" lIns="0" tIns="0" rIns="0" bIns="0" rtlCol="0" anchor="t"/>
           <a:lstStyle/>
           <a:p>
-            <a:pPr indent="0" marL="0">
+            <a:pPr marL="0" indent="0">
               <a:buNone/>
             </a:pPr>
             <a:r>
@@ -12041,14 +11967,14 @@
       </p:sp>
       <p:pic>
         <p:nvPicPr>
-          <p:cNvPr id="3" name="Image 0" descr="logo.png">    </p:cNvPr>
+          <p:cNvPr id="3" name="Image 0" descr="logo.png"/>
           <p:cNvPicPr>
             <a:picLocks noChangeAspect="1"/>
           </p:cNvPicPr>
           <p:nvPr/>
         </p:nvPicPr>
         <p:blipFill>
-          <a:blip r:embed="rId1"/>
+          <a:blip r:embed="rId3"/>
           <a:stretch>
             <a:fillRect/>
           </a:stretch>
@@ -12084,7 +12010,7 @@
           <a:bodyPr wrap="square" lIns="0" tIns="0" rIns="0" bIns="0" rtlCol="0" anchor="t"/>
           <a:lstStyle/>
           <a:p>
-            <a:pPr indent="0" marL="0">
+            <a:pPr marL="0" indent="0">
               <a:buNone/>
             </a:pPr>
             <a:r>
@@ -12125,12 +12051,48 @@
             <a:tbl>
               <a:tblPr/>
               <a:tblGrid>
-                <a:gridCol w="2286000"/>
-                <a:gridCol w="1737360"/>
-                <a:gridCol w="2834640"/>
-                <a:gridCol w="1920240"/>
-                <a:gridCol w="1143000"/>
-                <a:gridCol w="896112"/>
+                <a:gridCol w="2286000">
+                  <a:extLst>
+                    <a:ext uri="{9D8B030D-6E8A-4147-A177-3AD203B41FA5}">
+                      <a16:colId xmlns:a16="http://schemas.microsoft.com/office/drawing/2014/main" val="20000"/>
+                    </a:ext>
+                  </a:extLst>
+                </a:gridCol>
+                <a:gridCol w="1737360">
+                  <a:extLst>
+                    <a:ext uri="{9D8B030D-6E8A-4147-A177-3AD203B41FA5}">
+                      <a16:colId xmlns:a16="http://schemas.microsoft.com/office/drawing/2014/main" val="20001"/>
+                    </a:ext>
+                  </a:extLst>
+                </a:gridCol>
+                <a:gridCol w="2834640">
+                  <a:extLst>
+                    <a:ext uri="{9D8B030D-6E8A-4147-A177-3AD203B41FA5}">
+                      <a16:colId xmlns:a16="http://schemas.microsoft.com/office/drawing/2014/main" val="20002"/>
+                    </a:ext>
+                  </a:extLst>
+                </a:gridCol>
+                <a:gridCol w="1920240">
+                  <a:extLst>
+                    <a:ext uri="{9D8B030D-6E8A-4147-A177-3AD203B41FA5}">
+                      <a16:colId xmlns:a16="http://schemas.microsoft.com/office/drawing/2014/main" val="20003"/>
+                    </a:ext>
+                  </a:extLst>
+                </a:gridCol>
+                <a:gridCol w="1143000">
+                  <a:extLst>
+                    <a:ext uri="{9D8B030D-6E8A-4147-A177-3AD203B41FA5}">
+                      <a16:colId xmlns:a16="http://schemas.microsoft.com/office/drawing/2014/main" val="20004"/>
+                    </a:ext>
+                  </a:extLst>
+                </a:gridCol>
+                <a:gridCol w="896112">
+                  <a:extLst>
+                    <a:ext uri="{9D8B030D-6E8A-4147-A177-3AD203B41FA5}">
+                      <a16:colId xmlns:a16="http://schemas.microsoft.com/office/drawing/2014/main" val="20005"/>
+                    </a:ext>
+                  </a:extLst>
+                </a:gridCol>
               </a:tblGrid>
               <a:tr h="512064">
                 <a:tc>
@@ -12138,7 +12100,7 @@
                     <a:bodyPr/>
                     <a:lstStyle/>
                     <a:p>
-                      <a:pPr indent="0" marL="0">
+                      <a:pPr marL="0" indent="0">
                         <a:buNone/>
                       </a:pPr>
                       <a:r>
@@ -12206,7 +12168,7 @@
                     <a:bodyPr/>
                     <a:lstStyle/>
                     <a:p>
-                      <a:pPr indent="0" marL="0">
+                      <a:pPr marL="0" indent="0">
                         <a:buNone/>
                       </a:pPr>
                       <a:r>
@@ -12274,7 +12236,7 @@
                     <a:bodyPr/>
                     <a:lstStyle/>
                     <a:p>
-                      <a:pPr indent="0" marL="0">
+                      <a:pPr marL="0" indent="0">
                         <a:buNone/>
                       </a:pPr>
                       <a:r>
@@ -12342,7 +12304,7 @@
                     <a:bodyPr/>
                     <a:lstStyle/>
                     <a:p>
-                      <a:pPr indent="0" marL="0">
+                      <a:pPr marL="0" indent="0">
                         <a:buNone/>
                       </a:pPr>
                       <a:r>
@@ -12410,7 +12372,7 @@
                     <a:bodyPr/>
                     <a:lstStyle/>
                     <a:p>
-                      <a:pPr indent="0" marL="0">
+                      <a:pPr marL="0" indent="0">
                         <a:buNone/>
                       </a:pPr>
                       <a:r>
@@ -12478,7 +12440,7 @@
                     <a:bodyPr/>
                     <a:lstStyle/>
                     <a:p>
-                      <a:pPr indent="0" marL="0">
+                      <a:pPr marL="0" indent="0">
                         <a:buNone/>
                       </a:pPr>
                       <a:r>
@@ -12541,6 +12503,11 @@
                     </a:solidFill>
                   </a:tcPr>
                 </a:tc>
+                <a:extLst>
+                  <a:ext uri="{0D108BD9-81ED-4DB2-BD59-A6C34878D82A}">
+                    <a16:rowId xmlns:a16="http://schemas.microsoft.com/office/drawing/2014/main" val="10000"/>
+                  </a:ext>
+                </a:extLst>
               </a:tr>
               <a:tr h="512064">
                 <a:tc>
@@ -12548,7 +12515,7 @@
                     <a:bodyPr/>
                     <a:lstStyle/>
                     <a:p>
-                      <a:pPr indent="0" marL="0">
+                      <a:pPr marL="0" indent="0">
                         <a:buNone/>
                       </a:pPr>
                       <a:r>
@@ -12616,7 +12583,7 @@
                     <a:bodyPr/>
                     <a:lstStyle/>
                     <a:p>
-                      <a:pPr indent="0" marL="0">
+                      <a:pPr marL="0" indent="0">
                         <a:buNone/>
                       </a:pPr>
                       <a:r>
@@ -12684,7 +12651,7 @@
                     <a:bodyPr/>
                     <a:lstStyle/>
                     <a:p>
-                      <a:pPr indent="0" marL="0">
+                      <a:pPr marL="0" indent="0">
                         <a:buNone/>
                       </a:pPr>
                       <a:r>
@@ -12752,7 +12719,7 @@
                     <a:bodyPr/>
                     <a:lstStyle/>
                     <a:p>
-                      <a:pPr indent="0" marL="0">
+                      <a:pPr marL="0" indent="0">
                         <a:buNone/>
                       </a:pPr>
                       <a:r>
@@ -12820,7 +12787,7 @@
                     <a:bodyPr/>
                     <a:lstStyle/>
                     <a:p>
-                      <a:pPr indent="0" marL="0">
+                      <a:pPr marL="0" indent="0">
                         <a:buNone/>
                       </a:pPr>
                       <a:r>
@@ -12888,7 +12855,7 @@
                     <a:bodyPr/>
                     <a:lstStyle/>
                     <a:p>
-                      <a:pPr indent="0" marL="0">
+                      <a:pPr marL="0" indent="0">
                         <a:buNone/>
                       </a:pPr>
                       <a:r>
@@ -12951,6 +12918,11 @@
                     </a:solidFill>
                   </a:tcPr>
                 </a:tc>
+                <a:extLst>
+                  <a:ext uri="{0D108BD9-81ED-4DB2-BD59-A6C34878D82A}">
+                    <a16:rowId xmlns:a16="http://schemas.microsoft.com/office/drawing/2014/main" val="10001"/>
+                  </a:ext>
+                </a:extLst>
               </a:tr>
               <a:tr h="512064">
                 <a:tc>
@@ -12958,7 +12930,7 @@
                     <a:bodyPr/>
                     <a:lstStyle/>
                     <a:p>
-                      <a:pPr indent="0" marL="0">
+                      <a:pPr marL="0" indent="0">
                         <a:buNone/>
                       </a:pPr>
                       <a:r>
@@ -13026,7 +12998,7 @@
                     <a:bodyPr/>
                     <a:lstStyle/>
                     <a:p>
-                      <a:pPr indent="0" marL="0">
+                      <a:pPr marL="0" indent="0">
                         <a:buNone/>
                       </a:pPr>
                       <a:r>
@@ -13094,7 +13066,7 @@
                     <a:bodyPr/>
                     <a:lstStyle/>
                     <a:p>
-                      <a:pPr indent="0" marL="0">
+                      <a:pPr marL="0" indent="0">
                         <a:buNone/>
                       </a:pPr>
                       <a:r>
@@ -13162,7 +13134,7 @@
                     <a:bodyPr/>
                     <a:lstStyle/>
                     <a:p>
-                      <a:pPr indent="0" marL="0">
+                      <a:pPr marL="0" indent="0">
                         <a:buNone/>
                       </a:pPr>
                       <a:r>
@@ -13230,7 +13202,7 @@
                     <a:bodyPr/>
                     <a:lstStyle/>
                     <a:p>
-                      <a:pPr indent="0" marL="0">
+                      <a:pPr marL="0" indent="0">
                         <a:buNone/>
                       </a:pPr>
                       <a:r>
@@ -13298,7 +13270,7 @@
                     <a:bodyPr/>
                     <a:lstStyle/>
                     <a:p>
-                      <a:pPr indent="0" marL="0">
+                      <a:pPr marL="0" indent="0">
                         <a:buNone/>
                       </a:pPr>
                       <a:r>
@@ -13361,6 +13333,11 @@
                     </a:solidFill>
                   </a:tcPr>
                 </a:tc>
+                <a:extLst>
+                  <a:ext uri="{0D108BD9-81ED-4DB2-BD59-A6C34878D82A}">
+                    <a16:rowId xmlns:a16="http://schemas.microsoft.com/office/drawing/2014/main" val="10002"/>
+                  </a:ext>
+                </a:extLst>
               </a:tr>
               <a:tr h="512064">
                 <a:tc>
@@ -13368,7 +13345,7 @@
                     <a:bodyPr/>
                     <a:lstStyle/>
                     <a:p>
-                      <a:pPr indent="0" marL="0">
+                      <a:pPr marL="0" indent="0">
                         <a:buNone/>
                       </a:pPr>
                       <a:r>
@@ -13436,7 +13413,7 @@
                     <a:bodyPr/>
                     <a:lstStyle/>
                     <a:p>
-                      <a:pPr indent="0" marL="0">
+                      <a:pPr marL="0" indent="0">
                         <a:buNone/>
                       </a:pPr>
                       <a:r>
@@ -13504,7 +13481,7 @@
                     <a:bodyPr/>
                     <a:lstStyle/>
                     <a:p>
-                      <a:pPr indent="0" marL="0">
+                      <a:pPr marL="0" indent="0">
                         <a:buNone/>
                       </a:pPr>
                       <a:r>
@@ -13572,7 +13549,7 @@
                     <a:bodyPr/>
                     <a:lstStyle/>
                     <a:p>
-                      <a:pPr indent="0" marL="0">
+                      <a:pPr marL="0" indent="0">
                         <a:buNone/>
                       </a:pPr>
                       <a:r>
@@ -13640,7 +13617,7 @@
                     <a:bodyPr/>
                     <a:lstStyle/>
                     <a:p>
-                      <a:pPr indent="0" marL="0">
+                      <a:pPr marL="0" indent="0">
                         <a:buNone/>
                       </a:pPr>
                       <a:r>
@@ -13708,7 +13685,7 @@
                     <a:bodyPr/>
                     <a:lstStyle/>
                     <a:p>
-                      <a:pPr indent="0" marL="0">
+                      <a:pPr marL="0" indent="0">
                         <a:buNone/>
                       </a:pPr>
                       <a:r>
@@ -13771,6 +13748,11 @@
                     </a:solidFill>
                   </a:tcPr>
                 </a:tc>
+                <a:extLst>
+                  <a:ext uri="{0D108BD9-81ED-4DB2-BD59-A6C34878D82A}">
+                    <a16:rowId xmlns:a16="http://schemas.microsoft.com/office/drawing/2014/main" val="10003"/>
+                  </a:ext>
+                </a:extLst>
               </a:tr>
               <a:tr h="512064">
                 <a:tc>
@@ -13778,7 +13760,7 @@
                     <a:bodyPr/>
                     <a:lstStyle/>
                     <a:p>
-                      <a:pPr indent="0" marL="0">
+                      <a:pPr marL="0" indent="0">
                         <a:buNone/>
                       </a:pPr>
                       <a:r>
@@ -13846,7 +13828,7 @@
                     <a:bodyPr/>
                     <a:lstStyle/>
                     <a:p>
-                      <a:pPr indent="0" marL="0">
+                      <a:pPr marL="0" indent="0">
                         <a:buNone/>
                       </a:pPr>
                       <a:r>
@@ -13914,7 +13896,7 @@
                     <a:bodyPr/>
                     <a:lstStyle/>
                     <a:p>
-                      <a:pPr indent="0" marL="0">
+                      <a:pPr marL="0" indent="0">
                         <a:buNone/>
                       </a:pPr>
                       <a:r>
@@ -13982,7 +13964,7 @@
                     <a:bodyPr/>
                     <a:lstStyle/>
                     <a:p>
-                      <a:pPr indent="0" marL="0">
+                      <a:pPr marL="0" indent="0">
                         <a:buNone/>
                       </a:pPr>
                       <a:r>
@@ -14050,7 +14032,7 @@
                     <a:bodyPr/>
                     <a:lstStyle/>
                     <a:p>
-                      <a:pPr indent="0" marL="0">
+                      <a:pPr marL="0" indent="0">
                         <a:buNone/>
                       </a:pPr>
                       <a:r>
@@ -14118,7 +14100,7 @@
                     <a:bodyPr/>
                     <a:lstStyle/>
                     <a:p>
-                      <a:pPr indent="0" marL="0">
+                      <a:pPr marL="0" indent="0">
                         <a:buNone/>
                       </a:pPr>
                       <a:r>
@@ -14181,6 +14163,11 @@
                     </a:solidFill>
                   </a:tcPr>
                 </a:tc>
+                <a:extLst>
+                  <a:ext uri="{0D108BD9-81ED-4DB2-BD59-A6C34878D82A}">
+                    <a16:rowId xmlns:a16="http://schemas.microsoft.com/office/drawing/2014/main" val="10004"/>
+                  </a:ext>
+                </a:extLst>
               </a:tr>
               <a:tr h="512064">
                 <a:tc>
@@ -14188,7 +14175,7 @@
                     <a:bodyPr/>
                     <a:lstStyle/>
                     <a:p>
-                      <a:pPr indent="0" marL="0">
+                      <a:pPr marL="0" indent="0">
                         <a:buNone/>
                       </a:pPr>
                       <a:r>
@@ -14256,7 +14243,7 @@
                     <a:bodyPr/>
                     <a:lstStyle/>
                     <a:p>
-                      <a:pPr indent="0" marL="0">
+                      <a:pPr marL="0" indent="0">
                         <a:buNone/>
                       </a:pPr>
                       <a:r>
@@ -14324,7 +14311,7 @@
                     <a:bodyPr/>
                     <a:lstStyle/>
                     <a:p>
-                      <a:pPr indent="0" marL="0">
+                      <a:pPr marL="0" indent="0">
                         <a:buNone/>
                       </a:pPr>
                       <a:r>
@@ -14392,7 +14379,7 @@
                     <a:bodyPr/>
                     <a:lstStyle/>
                     <a:p>
-                      <a:pPr indent="0" marL="0">
+                      <a:pPr marL="0" indent="0">
                         <a:buNone/>
                       </a:pPr>
                       <a:r>
@@ -14460,7 +14447,7 @@
                     <a:bodyPr/>
                     <a:lstStyle/>
                     <a:p>
-                      <a:pPr indent="0" marL="0">
+                      <a:pPr marL="0" indent="0">
                         <a:buNone/>
                       </a:pPr>
                       <a:r>
@@ -14528,7 +14515,7 @@
                     <a:bodyPr/>
                     <a:lstStyle/>
                     <a:p>
-                      <a:pPr indent="0" marL="0">
+                      <a:pPr marL="0" indent="0">
                         <a:buNone/>
                       </a:pPr>
                       <a:r>
@@ -14591,6 +14578,11 @@
                     </a:solidFill>
                   </a:tcPr>
                 </a:tc>
+                <a:extLst>
+                  <a:ext uri="{0D108BD9-81ED-4DB2-BD59-A6C34878D82A}">
+                    <a16:rowId xmlns:a16="http://schemas.microsoft.com/office/drawing/2014/main" val="10005"/>
+                  </a:ext>
+                </a:extLst>
               </a:tr>
             </a:tbl>
           </a:graphicData>
@@ -14624,7 +14616,10 @@
         </p:spPr>
         <p:txBody>
           <a:bodyPr anchor="t"/>
-          <a:p/>
+          <a:lstStyle/>
+          <a:p>
+            <a:endParaRPr/>
+          </a:p>
         </p:txBody>
       </p:sp>
       <p:sp>
@@ -14648,7 +14643,7 @@
           <a:bodyPr wrap="square" lIns="0" tIns="0" rIns="0" bIns="0" rtlCol="0" anchor="t"/>
           <a:lstStyle/>
           <a:p>
-            <a:pPr indent="0" marL="0">
+            <a:pPr marL="0" indent="0">
               <a:buNone/>
             </a:pPr>
             <a:r>
@@ -14668,7 +14663,7 @@
       </p:sp>
       <p:sp>
         <p:nvSpPr>
-          <p:cNvPr id="8" name="Text 4"/>
+          <p:cNvPr id="5" name="Text 4"/>
           <p:cNvSpPr txBox="1"/>
           <p:nvPr/>
         </p:nvSpPr>
@@ -14687,7 +14682,7 @@
           <a:bodyPr wrap="square" lIns="0" tIns="0" rIns="0" bIns="0" rtlCol="0" anchor="t"/>
           <a:lstStyle/>
           <a:p>
-            <a:pPr algn="r" indent="0" marL="0">
+            <a:pPr marL="0" indent="0" algn="r">
               <a:buNone/>
             </a:pPr>
             <a:r>
@@ -14721,6 +14716,7 @@
         <a:solidFill>
           <a:srgbClr val="0B1220"/>
         </a:solidFill>
+        <a:effectLst/>
       </p:bgPr>
     </p:bg>
     <p:spTree>
@@ -14758,7 +14754,7 @@
           <a:bodyPr wrap="square" lIns="0" tIns="0" rIns="0" bIns="0" rtlCol="0" anchor="t"/>
           <a:lstStyle/>
           <a:p>
-            <a:pPr indent="0" marL="0">
+            <a:pPr marL="0" indent="0">
               <a:buNone/>
             </a:pPr>
             <a:r>
@@ -14778,14 +14774,14 @@
       </p:sp>
       <p:pic>
         <p:nvPicPr>
-          <p:cNvPr id="3" name="Image 0" descr="logo.png">    </p:cNvPr>
+          <p:cNvPr id="3" name="Image 0" descr="logo.png"/>
           <p:cNvPicPr>
             <a:picLocks noChangeAspect="1"/>
           </p:cNvPicPr>
           <p:nvPr/>
         </p:nvPicPr>
         <p:blipFill>
-          <a:blip r:embed="rId1"/>
+          <a:blip r:embed="rId3"/>
           <a:stretch>
             <a:fillRect/>
           </a:stretch>
@@ -14821,7 +14817,7 @@
           <a:bodyPr wrap="square" lIns="0" tIns="0" rIns="0" bIns="0" rtlCol="0" anchor="t"/>
           <a:lstStyle/>
           <a:p>
-            <a:pPr indent="0" marL="0">
+            <a:pPr marL="0" indent="0">
               <a:buNone/>
             </a:pPr>
             <a:r>
@@ -14867,7 +14863,10 @@
         </p:spPr>
         <p:txBody>
           <a:bodyPr anchor="t"/>
-          <a:p/>
+          <a:lstStyle/>
+          <a:p>
+            <a:endParaRPr/>
+          </a:p>
         </p:txBody>
       </p:sp>
       <p:sp>
@@ -14891,7 +14890,7 @@
           <a:bodyPr wrap="square" lIns="0" tIns="0" rIns="0" bIns="0" rtlCol="0" anchor="t"/>
           <a:lstStyle/>
           <a:p>
-            <a:pPr indent="0" marL="0">
+            <a:pPr marL="0" indent="0">
               <a:buNone/>
             </a:pPr>
             <a:r>
@@ -14911,14 +14910,14 @@
       </p:sp>
       <p:pic>
         <p:nvPicPr>
-          <p:cNvPr id="7" name="Image 1" descr="retention.png">    </p:cNvPr>
+          <p:cNvPr id="7" name="Image 1" descr="retention.png"/>
           <p:cNvPicPr>
             <a:picLocks noChangeAspect="1"/>
           </p:cNvPicPr>
           <p:nvPr/>
         </p:nvPicPr>
         <p:blipFill>
-          <a:blip r:embed="rId2"/>
+          <a:blip r:embed="rId4"/>
           <a:stretch>
             <a:fillRect/>
           </a:stretch>
@@ -14961,7 +14960,10 @@
         </p:spPr>
         <p:txBody>
           <a:bodyPr anchor="t"/>
-          <a:p/>
+          <a:lstStyle/>
+          <a:p>
+            <a:endParaRPr/>
+          </a:p>
         </p:txBody>
       </p:sp>
       <p:sp>
@@ -14985,7 +14987,7 @@
           <a:bodyPr wrap="square" lIns="0" tIns="0" rIns="0" bIns="0" rtlCol="0" anchor="t"/>
           <a:lstStyle/>
           <a:p>
-            <a:pPr indent="0" marL="0">
+            <a:pPr marL="0" indent="0">
               <a:buNone/>
             </a:pPr>
             <a:r>
@@ -15024,7 +15026,7 @@
           <a:bodyPr wrap="square" lIns="0" tIns="0" rIns="0" bIns="0" rtlCol="0" anchor="t"/>
           <a:lstStyle/>
           <a:p>
-            <a:pPr indent="0" marL="0">
+            <a:pPr marL="0" indent="0">
               <a:buNone/>
             </a:pPr>
             <a:r>
@@ -15070,7 +15072,10 @@
         </p:spPr>
         <p:txBody>
           <a:bodyPr anchor="t"/>
-          <a:p/>
+          <a:lstStyle/>
+          <a:p>
+            <a:endParaRPr/>
+          </a:p>
         </p:txBody>
       </p:sp>
       <p:sp>
@@ -15094,7 +15099,7 @@
           <a:bodyPr wrap="square" lIns="0" tIns="0" rIns="0" bIns="0" rtlCol="0" anchor="t"/>
           <a:lstStyle/>
           <a:p>
-            <a:pPr indent="0" marL="0">
+            <a:pPr marL="0" indent="0">
               <a:buNone/>
             </a:pPr>
             <a:r>
@@ -15133,7 +15138,7 @@
           <a:bodyPr wrap="square" lIns="0" tIns="0" rIns="0" bIns="0" rtlCol="0" anchor="t"/>
           <a:lstStyle/>
           <a:p>
-            <a:pPr indent="0" marL="0">
+            <a:pPr marL="0" indent="0">
               <a:buNone/>
             </a:pPr>
             <a:r>
@@ -15179,7 +15184,10 @@
         </p:spPr>
         <p:txBody>
           <a:bodyPr anchor="t"/>
-          <a:p/>
+          <a:lstStyle/>
+          <a:p>
+            <a:endParaRPr/>
+          </a:p>
         </p:txBody>
       </p:sp>
       <p:sp>
@@ -15203,7 +15211,7 @@
           <a:bodyPr wrap="square" lIns="0" tIns="0" rIns="0" bIns="0" rtlCol="0" anchor="t"/>
           <a:lstStyle/>
           <a:p>
-            <a:pPr indent="0" marL="0">
+            <a:pPr marL="0" indent="0">
               <a:buNone/>
             </a:pPr>
             <a:r>
@@ -15242,7 +15250,7 @@
           <a:bodyPr wrap="square" lIns="0" tIns="0" rIns="0" bIns="0" rtlCol="0" anchor="t"/>
           <a:lstStyle/>
           <a:p>
-            <a:pPr indent="0" marL="0">
+            <a:pPr marL="0" indent="0">
               <a:buNone/>
             </a:pPr>
             <a:r>
@@ -15281,7 +15289,7 @@
           <a:bodyPr wrap="square" lIns="0" tIns="0" rIns="0" bIns="0" rtlCol="0" anchor="t"/>
           <a:lstStyle/>
           <a:p>
-            <a:pPr indent="0" marL="0">
+            <a:pPr marL="0" indent="0">
               <a:buNone/>
             </a:pPr>
             <a:r>
@@ -15320,7 +15328,7 @@
           <a:bodyPr wrap="square" lIns="0" tIns="0" rIns="0" bIns="0" rtlCol="0" anchor="t"/>
           <a:lstStyle/>
           <a:p>
-            <a:pPr algn="r" indent="0" marL="0">
+            <a:pPr marL="0" indent="0" algn="r">
               <a:buNone/>
             </a:pPr>
             <a:r>
@@ -15354,6 +15362,7 @@
         <a:solidFill>
           <a:srgbClr val="0B1220"/>
         </a:solidFill>
+        <a:effectLst/>
       </p:bgPr>
     </p:bg>
     <p:spTree>
@@ -15391,7 +15400,7 @@
           <a:bodyPr wrap="square" lIns="0" tIns="0" rIns="0" bIns="0" rtlCol="0" anchor="t"/>
           <a:lstStyle/>
           <a:p>
-            <a:pPr indent="0" marL="0">
+            <a:pPr marL="0" indent="0">
               <a:buNone/>
             </a:pPr>
             <a:r>
@@ -15411,14 +15420,14 @@
       </p:sp>
       <p:pic>
         <p:nvPicPr>
-          <p:cNvPr id="3" name="Image 0" descr="logo.png">    </p:cNvPr>
+          <p:cNvPr id="3" name="Image 0" descr="logo.png"/>
           <p:cNvPicPr>
             <a:picLocks noChangeAspect="1"/>
           </p:cNvPicPr>
           <p:nvPr/>
         </p:nvPicPr>
         <p:blipFill>
-          <a:blip r:embed="rId1"/>
+          <a:blip r:embed="rId3"/>
           <a:stretch>
             <a:fillRect/>
           </a:stretch>
@@ -15454,7 +15463,7 @@
           <a:bodyPr wrap="square" lIns="0" tIns="0" rIns="0" bIns="0" rtlCol="0" anchor="t"/>
           <a:lstStyle/>
           <a:p>
-            <a:pPr indent="0" marL="0">
+            <a:pPr marL="0" indent="0">
               <a:buNone/>
             </a:pPr>
             <a:r>
@@ -15500,7 +15509,10 @@
         </p:spPr>
         <p:txBody>
           <a:bodyPr anchor="t"/>
-          <a:p/>
+          <a:lstStyle/>
+          <a:p>
+            <a:endParaRPr/>
+          </a:p>
         </p:txBody>
       </p:sp>
       <p:sp>
@@ -15524,7 +15536,7 @@
           <a:bodyPr wrap="square" lIns="0" tIns="0" rIns="0" bIns="0" rtlCol="0" anchor="t"/>
           <a:lstStyle/>
           <a:p>
-            <a:pPr indent="0" marL="0">
+            <a:pPr marL="0" indent="0">
               <a:buNone/>
             </a:pPr>
             <a:r>
@@ -15563,7 +15575,7 @@
           <a:bodyPr wrap="square" lIns="0" tIns="0" rIns="0" bIns="0" rtlCol="0" anchor="t"/>
           <a:lstStyle/>
           <a:p>
-            <a:pPr indent="0" marL="0">
+            <a:pPr marL="0" indent="0">
               <a:buNone/>
             </a:pPr>
             <a:r>
@@ -15609,7 +15621,10 @@
         </p:spPr>
         <p:txBody>
           <a:bodyPr anchor="t"/>
-          <a:p/>
+          <a:lstStyle/>
+          <a:p>
+            <a:endParaRPr/>
+          </a:p>
         </p:txBody>
       </p:sp>
       <p:sp>
@@ -15633,7 +15648,7 @@
           <a:bodyPr wrap="square" lIns="0" tIns="0" rIns="0" bIns="0" rtlCol="0" anchor="t"/>
           <a:lstStyle/>
           <a:p>
-            <a:pPr indent="0" marL="0">
+            <a:pPr marL="0" indent="0">
               <a:buNone/>
             </a:pPr>
             <a:r>
@@ -15672,7 +15687,7 @@
           <a:bodyPr wrap="square" lIns="0" tIns="0" rIns="0" bIns="0" rtlCol="0" anchor="t"/>
           <a:lstStyle/>
           <a:p>
-            <a:pPr indent="0" marL="0">
+            <a:pPr marL="0" indent="0">
               <a:buNone/>
             </a:pPr>
             <a:r>
@@ -15718,7 +15733,10 @@
         </p:spPr>
         <p:txBody>
           <a:bodyPr anchor="t"/>
-          <a:p/>
+          <a:lstStyle/>
+          <a:p>
+            <a:endParaRPr/>
+          </a:p>
         </p:txBody>
       </p:sp>
       <p:sp>
@@ -15742,7 +15760,7 @@
           <a:bodyPr wrap="square" lIns="0" tIns="0" rIns="0" bIns="0" rtlCol="0" anchor="t"/>
           <a:lstStyle/>
           <a:p>
-            <a:pPr indent="0" marL="0">
+            <a:pPr marL="0" indent="0">
               <a:buNone/>
             </a:pPr>
             <a:r>
@@ -15781,7 +15799,7 @@
           <a:bodyPr wrap="square" lIns="0" tIns="0" rIns="0" bIns="0" rtlCol="0" anchor="t"/>
           <a:lstStyle/>
           <a:p>
-            <a:pPr indent="0" marL="0">
+            <a:pPr marL="0" indent="0">
               <a:buNone/>
             </a:pPr>
             <a:r>
@@ -15827,7 +15845,10 @@
         </p:spPr>
         <p:txBody>
           <a:bodyPr anchor="t"/>
-          <a:p/>
+          <a:lstStyle/>
+          <a:p>
+            <a:endParaRPr/>
+          </a:p>
         </p:txBody>
       </p:sp>
       <p:sp>
@@ -15851,7 +15872,7 @@
           <a:bodyPr wrap="square" lIns="0" tIns="0" rIns="0" bIns="0" rtlCol="0" anchor="t"/>
           <a:lstStyle/>
           <a:p>
-            <a:pPr indent="0" marL="0">
+            <a:pPr marL="0" indent="0">
               <a:buNone/>
             </a:pPr>
             <a:r>
@@ -15890,7 +15911,7 @@
           <a:bodyPr wrap="square" lIns="0" tIns="0" rIns="0" bIns="0" rtlCol="0" anchor="t"/>
           <a:lstStyle/>
           <a:p>
-            <a:pPr indent="0" marL="0">
+            <a:pPr marL="0" indent="0">
               <a:buNone/>
             </a:pPr>
             <a:r>
@@ -15929,7 +15950,7 @@
           <a:bodyPr wrap="square" lIns="0" tIns="0" rIns="0" bIns="0" rtlCol="0" anchor="t"/>
           <a:lstStyle/>
           <a:p>
-            <a:pPr indent="0" marL="0">
+            <a:pPr marL="0" indent="0">
               <a:buNone/>
             </a:pPr>
             <a:r>
@@ -15968,7 +15989,7 @@
           <a:bodyPr wrap="square" lIns="0" tIns="0" rIns="0" bIns="0" rtlCol="0" anchor="t"/>
           <a:lstStyle/>
           <a:p>
-            <a:pPr algn="r" indent="0" marL="0">
+            <a:pPr marL="0" indent="0" algn="r">
               <a:buNone/>
             </a:pPr>
             <a:r>
@@ -16287,4 +16308,319 @@
     </a:ext>
   </a:extLst>
 </a:theme>
+</file>
+
+<file path=ppt/theme/theme2.xml><?xml version="1.0" encoding="utf-8"?>
+<a:theme xmlns:a="http://schemas.openxmlformats.org/drawingml/2006/main" name="Office Theme">
+  <a:themeElements>
+    <a:clrScheme name="Office">
+      <a:dk1>
+        <a:sysClr val="windowText" lastClr="000000"/>
+      </a:dk1>
+      <a:lt1>
+        <a:sysClr val="window" lastClr="FFFFFF"/>
+      </a:lt1>
+      <a:dk2>
+        <a:srgbClr val="0E2841"/>
+      </a:dk2>
+      <a:lt2>
+        <a:srgbClr val="E8E8E8"/>
+      </a:lt2>
+      <a:accent1>
+        <a:srgbClr val="156082"/>
+      </a:accent1>
+      <a:accent2>
+        <a:srgbClr val="E97132"/>
+      </a:accent2>
+      <a:accent3>
+        <a:srgbClr val="196B24"/>
+      </a:accent3>
+      <a:accent4>
+        <a:srgbClr val="0F9ED5"/>
+      </a:accent4>
+      <a:accent5>
+        <a:srgbClr val="A02B93"/>
+      </a:accent5>
+      <a:accent6>
+        <a:srgbClr val="4EA72E"/>
+      </a:accent6>
+      <a:hlink>
+        <a:srgbClr val="467886"/>
+      </a:hlink>
+      <a:folHlink>
+        <a:srgbClr val="96607D"/>
+      </a:folHlink>
+    </a:clrScheme>
+    <a:fontScheme name="Office">
+      <a:majorFont>
+        <a:latin typeface="Aptos Display" panose="02110004020202020204"/>
+        <a:ea typeface=""/>
+        <a:cs typeface=""/>
+        <a:font script="Jpan" typeface="游ゴシック Light"/>
+        <a:font script="Hang" typeface="맑은 고딕"/>
+        <a:font script="Hans" typeface="等线 Light"/>
+        <a:font script="Hant" typeface="新細明體"/>
+        <a:font script="Arab" typeface="Times New Roman"/>
+        <a:font script="Hebr" typeface="Times New Roman"/>
+        <a:font script="Thai" typeface="Angsana New"/>
+        <a:font script="Ethi" typeface="Nyala"/>
+        <a:font script="Beng" typeface="Vrinda"/>
+        <a:font script="Gujr" typeface="Shruti"/>
+        <a:font script="Khmr" typeface="MoolBoran"/>
+        <a:font script="Knda" typeface="Tunga"/>
+        <a:font script="Guru" typeface="Raavi"/>
+        <a:font script="Cans" typeface="Euphemia"/>
+        <a:font script="Cher" typeface="Plantagenet Cherokee"/>
+        <a:font script="Yiii" typeface="Microsoft Yi Baiti"/>
+        <a:font script="Tibt" typeface="Microsoft Himalaya"/>
+        <a:font script="Thaa" typeface="MV Boli"/>
+        <a:font script="Deva" typeface="Mangal"/>
+        <a:font script="Telu" typeface="Gautami"/>
+        <a:font script="Taml" typeface="Latha"/>
+        <a:font script="Syrc" typeface="Estrangelo Edessa"/>
+        <a:font script="Orya" typeface="Kalinga"/>
+        <a:font script="Mlym" typeface="Kartika"/>
+        <a:font script="Laoo" typeface="DokChampa"/>
+        <a:font script="Sinh" typeface="Iskoola Pota"/>
+        <a:font script="Mong" typeface="Mongolian Baiti"/>
+        <a:font script="Viet" typeface="Times New Roman"/>
+        <a:font script="Uigh" typeface="Microsoft Uighur"/>
+        <a:font script="Geor" typeface="Sylfaen"/>
+        <a:font script="Armn" typeface="Arial"/>
+        <a:font script="Bugi" typeface="Leelawadee UI"/>
+        <a:font script="Bopo" typeface="Microsoft JhengHei"/>
+        <a:font script="Java" typeface="Javanese Text"/>
+        <a:font script="Lisu" typeface="Segoe UI"/>
+        <a:font script="Mymr" typeface="Myanmar Text"/>
+        <a:font script="Nkoo" typeface="Ebrima"/>
+        <a:font script="Olck" typeface="Nirmala UI"/>
+        <a:font script="Osma" typeface="Ebrima"/>
+        <a:font script="Phag" typeface="Phagspa"/>
+        <a:font script="Syrn" typeface="Estrangelo Edessa"/>
+        <a:font script="Syrj" typeface="Estrangelo Edessa"/>
+        <a:font script="Syre" typeface="Estrangelo Edessa"/>
+        <a:font script="Sora" typeface="Nirmala UI"/>
+        <a:font script="Tale" typeface="Microsoft Tai Le"/>
+        <a:font script="Talu" typeface="Microsoft New Tai Lue"/>
+        <a:font script="Tfng" typeface="Ebrima"/>
+      </a:majorFont>
+      <a:minorFont>
+        <a:latin typeface="Aptos" panose="02110004020202020204"/>
+        <a:ea typeface=""/>
+        <a:cs typeface=""/>
+        <a:font script="Jpan" typeface="游ゴシック"/>
+        <a:font script="Hang" typeface="맑은 고딕"/>
+        <a:font script="Hans" typeface="等线"/>
+        <a:font script="Hant" typeface="新細明體"/>
+        <a:font script="Arab" typeface="Arial"/>
+        <a:font script="Hebr" typeface="Arial"/>
+        <a:font script="Thai" typeface="Cordia New"/>
+        <a:font script="Ethi" typeface="Nyala"/>
+        <a:font script="Beng" typeface="Vrinda"/>
+        <a:font script="Gujr" typeface="Shruti"/>
+        <a:font script="Khmr" typeface="DaunPenh"/>
+        <a:font script="Knda" typeface="Tunga"/>
+        <a:font script="Guru" typeface="Raavi"/>
+        <a:font script="Cans" typeface="Euphemia"/>
+        <a:font script="Cher" typeface="Plantagenet Cherokee"/>
+        <a:font script="Yiii" typeface="Microsoft Yi Baiti"/>
+        <a:font script="Tibt" typeface="Microsoft Himalaya"/>
+        <a:font script="Thaa" typeface="MV Boli"/>
+        <a:font script="Deva" typeface="Mangal"/>
+        <a:font script="Telu" typeface="Gautami"/>
+        <a:font script="Taml" typeface="Latha"/>
+        <a:font script="Syrc" typeface="Estrangelo Edessa"/>
+        <a:font script="Orya" typeface="Kalinga"/>
+        <a:font script="Mlym" typeface="Kartika"/>
+        <a:font script="Laoo" typeface="DokChampa"/>
+        <a:font script="Sinh" typeface="Iskoola Pota"/>
+        <a:font script="Mong" typeface="Mongolian Baiti"/>
+        <a:font script="Viet" typeface="Arial"/>
+        <a:font script="Uigh" typeface="Microsoft Uighur"/>
+        <a:font script="Geor" typeface="Sylfaen"/>
+        <a:font script="Armn" typeface="Arial"/>
+        <a:font script="Bugi" typeface="Leelawadee UI"/>
+        <a:font script="Bopo" typeface="Microsoft JhengHei"/>
+        <a:font script="Java" typeface="Javanese Text"/>
+        <a:font script="Lisu" typeface="Segoe UI"/>
+        <a:font script="Mymr" typeface="Myanmar Text"/>
+        <a:font script="Nkoo" typeface="Ebrima"/>
+        <a:font script="Olck" typeface="Nirmala UI"/>
+        <a:font script="Osma" typeface="Ebrima"/>
+        <a:font script="Phag" typeface="Phagspa"/>
+        <a:font script="Syrn" typeface="Estrangelo Edessa"/>
+        <a:font script="Syrj" typeface="Estrangelo Edessa"/>
+        <a:font script="Syre" typeface="Estrangelo Edessa"/>
+        <a:font script="Sora" typeface="Nirmala UI"/>
+        <a:font script="Tale" typeface="Microsoft Tai Le"/>
+        <a:font script="Talu" typeface="Microsoft New Tai Lue"/>
+        <a:font script="Tfng" typeface="Ebrima"/>
+      </a:minorFont>
+    </a:fontScheme>
+    <a:fmtScheme name="Office">
+      <a:fillStyleLst>
+        <a:solidFill>
+          <a:schemeClr val="phClr"/>
+        </a:solidFill>
+        <a:gradFill rotWithShape="1">
+          <a:gsLst>
+            <a:gs pos="0">
+              <a:schemeClr val="phClr">
+                <a:lumMod val="110000"/>
+                <a:satMod val="105000"/>
+                <a:tint val="67000"/>
+              </a:schemeClr>
+            </a:gs>
+            <a:gs pos="50000">
+              <a:schemeClr val="phClr">
+                <a:lumMod val="105000"/>
+                <a:satMod val="103000"/>
+                <a:tint val="73000"/>
+              </a:schemeClr>
+            </a:gs>
+            <a:gs pos="100000">
+              <a:schemeClr val="phClr">
+                <a:lumMod val="105000"/>
+                <a:satMod val="109000"/>
+                <a:tint val="81000"/>
+              </a:schemeClr>
+            </a:gs>
+          </a:gsLst>
+          <a:lin ang="5400000" scaled="0"/>
+        </a:gradFill>
+        <a:gradFill rotWithShape="1">
+          <a:gsLst>
+            <a:gs pos="0">
+              <a:schemeClr val="phClr">
+                <a:satMod val="103000"/>
+                <a:lumMod val="102000"/>
+                <a:tint val="94000"/>
+              </a:schemeClr>
+            </a:gs>
+            <a:gs pos="50000">
+              <a:schemeClr val="phClr">
+                <a:satMod val="110000"/>
+                <a:lumMod val="100000"/>
+                <a:shade val="100000"/>
+              </a:schemeClr>
+            </a:gs>
+            <a:gs pos="100000">
+              <a:schemeClr val="phClr">
+                <a:lumMod val="99000"/>
+                <a:satMod val="120000"/>
+                <a:shade val="78000"/>
+              </a:schemeClr>
+            </a:gs>
+          </a:gsLst>
+          <a:lin ang="5400000" scaled="0"/>
+        </a:gradFill>
+      </a:fillStyleLst>
+      <a:lnStyleLst>
+        <a:ln w="12700" cap="flat" cmpd="sng" algn="ctr">
+          <a:solidFill>
+            <a:schemeClr val="phClr"/>
+          </a:solidFill>
+          <a:prstDash val="solid"/>
+          <a:miter lim="800000"/>
+        </a:ln>
+        <a:ln w="19050" cap="flat" cmpd="sng" algn="ctr">
+          <a:solidFill>
+            <a:schemeClr val="phClr"/>
+          </a:solidFill>
+          <a:prstDash val="solid"/>
+          <a:miter lim="800000"/>
+        </a:ln>
+        <a:ln w="25400" cap="flat" cmpd="sng" algn="ctr">
+          <a:solidFill>
+            <a:schemeClr val="phClr"/>
+          </a:solidFill>
+          <a:prstDash val="solid"/>
+          <a:miter lim="800000"/>
+        </a:ln>
+      </a:lnStyleLst>
+      <a:effectStyleLst>
+        <a:effectStyle>
+          <a:effectLst/>
+        </a:effectStyle>
+        <a:effectStyle>
+          <a:effectLst/>
+        </a:effectStyle>
+        <a:effectStyle>
+          <a:effectLst>
+            <a:outerShdw blurRad="57150" dist="19050" dir="5400000" algn="ctr" rotWithShape="0">
+              <a:srgbClr val="000000">
+                <a:alpha val="63000"/>
+              </a:srgbClr>
+            </a:outerShdw>
+          </a:effectLst>
+        </a:effectStyle>
+      </a:effectStyleLst>
+      <a:bgFillStyleLst>
+        <a:solidFill>
+          <a:schemeClr val="phClr"/>
+        </a:solidFill>
+        <a:solidFill>
+          <a:schemeClr val="phClr">
+            <a:tint val="95000"/>
+            <a:satMod val="170000"/>
+          </a:schemeClr>
+        </a:solidFill>
+        <a:gradFill rotWithShape="1">
+          <a:gsLst>
+            <a:gs pos="0">
+              <a:schemeClr val="phClr">
+                <a:tint val="93000"/>
+                <a:satMod val="150000"/>
+                <a:shade val="98000"/>
+                <a:lumMod val="102000"/>
+              </a:schemeClr>
+            </a:gs>
+            <a:gs pos="50000">
+              <a:schemeClr val="phClr">
+                <a:tint val="98000"/>
+                <a:satMod val="130000"/>
+                <a:shade val="90000"/>
+                <a:lumMod val="103000"/>
+              </a:schemeClr>
+            </a:gs>
+            <a:gs pos="100000">
+              <a:schemeClr val="phClr">
+                <a:shade val="63000"/>
+                <a:satMod val="120000"/>
+              </a:schemeClr>
+            </a:gs>
+          </a:gsLst>
+          <a:lin ang="5400000" scaled="0"/>
+        </a:gradFill>
+      </a:bgFillStyleLst>
+    </a:fmtScheme>
+  </a:themeElements>
+  <a:objectDefaults>
+    <a:lnDef>
+      <a:spPr/>
+      <a:bodyPr/>
+      <a:lstStyle/>
+      <a:style>
+        <a:lnRef idx="2">
+          <a:schemeClr val="accent1"/>
+        </a:lnRef>
+        <a:fillRef idx="0">
+          <a:schemeClr val="accent1"/>
+        </a:fillRef>
+        <a:effectRef idx="1">
+          <a:schemeClr val="accent1"/>
+        </a:effectRef>
+        <a:fontRef idx="minor">
+          <a:schemeClr val="tx1"/>
+        </a:fontRef>
+      </a:style>
+    </a:lnDef>
+  </a:objectDefaults>
+  <a:extraClrSchemeLst/>
+  <a:extLst>
+    <a:ext uri="{05A4C25C-085E-4340-85A3-A5531E510DB2}">
+      <thm15:themeFamily xmlns:thm15="http://schemas.microsoft.com/office/thememl/2012/main" name="Office Theme" id="{2E142A2C-CD16-42D6-873A-C26D2A0506FA}" vid="{1BDDFF52-6CD6-40A5-AB3C-68EB2F1E4D0A}"/>
+    </a:ext>
+  </a:extLst>
+</a:theme>
 </file>